--- a/Project/Forecasting & Predictive Modeling/Headcount Attrition - Survival Analysis/result/slides/Executive_Attrition_Report.pptx
+++ b/Project/Forecasting & Predictive Modeling/Headcount Attrition - Survival Analysis/result/slides/Executive_Attrition_Report.pptx
@@ -8,6 +8,9 @@
     <p:sldId id="256" r:id="rId7"/>
     <p:sldId id="257" r:id="rId8"/>
     <p:sldId id="258" r:id="rId9"/>
+    <p:sldId id="259" r:id="rId10"/>
+    <p:sldId id="260" r:id="rId11"/>
+    <p:sldId id="261" r:id="rId12"/>
   </p:sldIdLst>
   <p:sldSz cx="9144000" cy="6858000" type="screen4x3"/>
   <p:notesSz cx="6858000" cy="9144000"/>
@@ -3098,8 +3101,8 @@
         </p:nvSpPr>
         <p:spPr>
           <a:xfrm>
-            <a:off x="457200" y="274320"/>
-            <a:ext cx="8229600" cy="914400"/>
+            <a:off x="365760" y="274320"/>
+            <a:ext cx="8412480" cy="731520"/>
           </a:xfrm>
           <a:prstGeom prst="rect">
             <a:avLst/>
@@ -3116,45 +3119,21 @@
               <a:defRPr sz="2800" b="1"/>
             </a:pPr>
             <a:r>
-              <a:t>Who Will Resign -- Key Drivers</a:t>
-            </a:r>
-          </a:p>
-        </p:txBody>
-      </p:sp>
-      <p:pic>
-        <p:nvPicPr>
-          <p:cNvPr id="3" name="Picture 2" descr="top_10_features.png"/>
-          <p:cNvPicPr>
-            <a:picLocks noChangeAspect="1"/>
-          </p:cNvPicPr>
+              <a:t>Executive Summary</a:t>
+            </a:r>
+          </a:p>
+        </p:txBody>
+      </p:sp>
+      <p:sp>
+        <p:nvSpPr>
+          <p:cNvPr id="3" name="TextBox 2"/>
+          <p:cNvSpPr txBox="1"/>
           <p:nvPr/>
-        </p:nvPicPr>
-        <p:blipFill>
-          <a:blip r:embed="rId2"/>
-          <a:stretch>
-            <a:fillRect/>
-          </a:stretch>
-        </p:blipFill>
+        </p:nvSpPr>
         <p:spPr>
           <a:xfrm>
-            <a:off x="457200" y="1371600"/>
-            <a:ext cx="4754880" cy="2852928"/>
-          </a:xfrm>
-          <a:prstGeom prst="rect">
-            <a:avLst/>
-          </a:prstGeom>
-        </p:spPr>
-      </p:pic>
-      <p:sp>
-        <p:nvSpPr>
-          <p:cNvPr id="4" name="TextBox 3"/>
-          <p:cNvSpPr txBox="1"/>
-          <p:nvPr/>
-        </p:nvSpPr>
-        <p:spPr>
-          <a:xfrm>
-            <a:off x="5486400" y="1371600"/>
-            <a:ext cx="3200400" cy="4572000"/>
+            <a:off x="548640" y="1188720"/>
+            <a:ext cx="2743200" cy="5029200"/>
           </a:xfrm>
           <a:prstGeom prst="rect">
             <a:avLst/>
@@ -3166,21 +3145,12 @@
             <a:spAutoFit/>
           </a:bodyPr>
           <a:lstStyle/>
-          <a:p/>
-          <a:p>
-            <a:pPr>
-              <a:defRPr b="1" sz="1800"/>
-            </a:pPr>
-            <a:r>
-              <a:t>Results:</a:t>
-            </a:r>
-          </a:p>
           <a:p>
             <a:pPr>
               <a:defRPr sz="1400"/>
             </a:pPr>
             <a:r>
-              <a:t>Accuracy: 0.779</a:t>
+              <a:t>- 1470 employees analyzed, 16.1% historical attrition rate.</a:t>
             </a:r>
           </a:p>
           <a:p>
@@ -3188,7 +3158,7 @@
               <a:defRPr sz="1400"/>
             </a:pPr>
             <a:r>
-              <a:t>ROC-AUC: 0.812</a:t>
+              <a:t>- 1233 employees currently active and scored for resignation risk.</a:t>
             </a:r>
           </a:p>
           <a:p>
@@ -3196,7 +3166,7 @@
               <a:defRPr sz="1400"/>
             </a:pPr>
             <a:r>
-              <a:t>Recall: 0.681</a:t>
+              <a:t>- Model validated at 0.846 concordance on held-out data (0.5 = random, 1.0 = perfect ranking).</a:t>
             </a:r>
           </a:p>
           <a:p>
@@ -3204,48 +3174,15 @@
               <a:defRPr sz="1400"/>
             </a:pPr>
             <a:r>
-              <a:t>F1: 0.496</a:t>
-            </a:r>
-          </a:p>
-          <a:p>
-            <a:br/>
+              <a:t>- Strongest driver: Over Time (Yes) (hazard x2.20).</a:t>
+            </a:r>
+          </a:p>
+          <a:p>
             <a:pPr>
-              <a:defRPr b="1" sz="1800"/>
+              <a:defRPr sz="1400"/>
             </a:pPr>
             <a:r>
-              <a:t>Key Remarks:</a:t>
-            </a:r>
-          </a:p>
-          <a:p>
-            <a:pPr>
-              <a:defRPr sz="1300"/>
-            </a:pPr>
-            <a:r>
-              <a:t>Over Time (No) is among the strongest predictors of attrition.</a:t>
-            </a:r>
-          </a:p>
-          <a:p>
-            <a:pPr>
-              <a:defRPr sz="1300"/>
-            </a:pPr>
-            <a:r>
-              <a:t>Over Time (Yes) is among the strongest predictors of attrition.</a:t>
-            </a:r>
-          </a:p>
-          <a:p>
-            <a:pPr>
-              <a:defRPr sz="1300"/>
-            </a:pPr>
-            <a:r>
-              <a:t>Job Role Laboratory Technician is among the strongest predictors of attrition.</a:t>
-            </a:r>
-          </a:p>
-          <a:p>
-            <a:pPr>
-              <a:defRPr sz="1300"/>
-            </a:pPr>
-            <a:r>
-              <a:t>Best model after tuning: Logistic Regression (81.2% ROC-AUC).</a:t>
+              <a:t>- Top at-risk employee: ID 2021, 25% predicted chance of leaving within a year.</a:t>
             </a:r>
           </a:p>
         </p:txBody>
@@ -3276,8 +3213,8 @@
         </p:nvSpPr>
         <p:spPr>
           <a:xfrm>
-            <a:off x="457200" y="274320"/>
-            <a:ext cx="8229600" cy="914400"/>
+            <a:off x="365760" y="274320"/>
+            <a:ext cx="8412480" cy="731520"/>
           </a:xfrm>
           <a:prstGeom prst="rect">
             <a:avLst/>
@@ -3294,45 +3231,21 @@
               <a:defRPr sz="2800" b="1"/>
             </a:pPr>
             <a:r>
-              <a:t>Model Accuracy -- Validation</a:t>
-            </a:r>
-          </a:p>
-        </p:txBody>
-      </p:sp>
-      <p:pic>
-        <p:nvPicPr>
-          <p:cNvPr id="3" name="Picture 2" descr="confusion_matrix.png"/>
-          <p:cNvPicPr>
-            <a:picLocks noChangeAspect="1"/>
-          </p:cNvPicPr>
+              <a:t>Model Validation</a:t>
+            </a:r>
+          </a:p>
+        </p:txBody>
+      </p:sp>
+      <p:sp>
+        <p:nvSpPr>
+          <p:cNvPr id="3" name="TextBox 2"/>
+          <p:cNvSpPr txBox="1"/>
           <p:nvPr/>
-        </p:nvPicPr>
-        <p:blipFill>
-          <a:blip r:embed="rId2"/>
-          <a:stretch>
-            <a:fillRect/>
-          </a:stretch>
-        </p:blipFill>
+        </p:nvSpPr>
         <p:spPr>
           <a:xfrm>
-            <a:off x="457200" y="1371600"/>
-            <a:ext cx="4754880" cy="3962400"/>
-          </a:xfrm>
-          <a:prstGeom prst="rect">
-            <a:avLst/>
-          </a:prstGeom>
-        </p:spPr>
-      </p:pic>
-      <p:sp>
-        <p:nvSpPr>
-          <p:cNvPr id="4" name="TextBox 3"/>
-          <p:cNvSpPr txBox="1"/>
-          <p:nvPr/>
-        </p:nvSpPr>
-        <p:spPr>
-          <a:xfrm>
-            <a:off x="5486400" y="1371600"/>
-            <a:ext cx="3200400" cy="4572000"/>
+            <a:off x="548640" y="1188720"/>
+            <a:ext cx="2743200" cy="5029200"/>
           </a:xfrm>
           <a:prstGeom prst="rect">
             <a:avLst/>
@@ -3344,21 +3257,12 @@
             <a:spAutoFit/>
           </a:bodyPr>
           <a:lstStyle/>
-          <a:p/>
-          <a:p>
-            <a:pPr>
-              <a:defRPr b="1" sz="1800"/>
-            </a:pPr>
-            <a:r>
-              <a:t>Results:</a:t>
-            </a:r>
-          </a:p>
           <a:p>
             <a:pPr>
               <a:defRPr sz="1400"/>
             </a:pPr>
             <a:r>
-              <a:t>Accuracy: 0.779</a:t>
+              <a:t>- Train concordance index: 0.849</a:t>
             </a:r>
           </a:p>
           <a:p>
@@ -3366,7 +3270,7 @@
               <a:defRPr sz="1400"/>
             </a:pPr>
             <a:r>
-              <a:t>Precision: 0.390</a:t>
+              <a:t>- Test concordance index: 0.846</a:t>
             </a:r>
           </a:p>
           <a:p>
@@ -3374,7 +3278,7 @@
               <a:defRPr sz="1400"/>
             </a:pPr>
             <a:r>
-              <a:t>Recall: 0.681</a:t>
+              <a:t>- Final model refit on all 1470 employees after validation.</a:t>
             </a:r>
           </a:p>
           <a:p>
@@ -3382,32 +3286,7 @@
               <a:defRPr sz="1400"/>
             </a:pPr>
             <a:r>
-              <a:t>F1: 0.496</a:t>
-            </a:r>
-          </a:p>
-          <a:p>
-            <a:br/>
-            <a:pPr>
-              <a:defRPr b="1" sz="1800"/>
-            </a:pPr>
-            <a:r>
-              <a:t>Key Remarks:</a:t>
-            </a:r>
-          </a:p>
-          <a:p>
-            <a:pPr>
-              <a:defRPr sz="1300"/>
-            </a:pPr>
-            <a:r>
-              <a:t>229.0 of 294 held-out employees (77.9%) were classified correctly.</a:t>
-            </a:r>
-          </a:p>
-          <a:p>
-            <a:pPr>
-              <a:defRPr sz="1300"/>
-            </a:pPr>
-            <a:r>
-              <a:t>The model catches 68.1% of employees who actually left (recall).</a:t>
+              <a:t>- Proportional hazards assumption checked per covariate (see notebook STEP 05 for details).</a:t>
             </a:r>
           </a:p>
         </p:txBody>
@@ -3438,8 +3317,8 @@
         </p:nvSpPr>
         <p:spPr>
           <a:xfrm>
-            <a:off x="457200" y="274320"/>
-            <a:ext cx="8229600" cy="914400"/>
+            <a:off x="365760" y="274320"/>
+            <a:ext cx="8412480" cy="731520"/>
           </a:xfrm>
           <a:prstGeom prst="rect">
             <a:avLst/>
@@ -3456,7 +3335,151 @@
               <a:defRPr sz="2800" b="1"/>
             </a:pPr>
             <a:r>
-              <a:t>When Will They Resign -- Survival Analysis</a:t>
+              <a:t>What Drives Attrition</a:t>
+            </a:r>
+          </a:p>
+        </p:txBody>
+      </p:sp>
+      <p:pic>
+        <p:nvPicPr>
+          <p:cNvPr id="3" name="Picture 2" descr="cox_hazard_ratios.png"/>
+          <p:cNvPicPr>
+            <a:picLocks noChangeAspect="1"/>
+          </p:cNvPicPr>
+          <p:nvPr/>
+        </p:nvPicPr>
+        <p:blipFill>
+          <a:blip r:embed="rId2"/>
+          <a:stretch>
+            <a:fillRect/>
+          </a:stretch>
+        </p:blipFill>
+        <p:spPr>
+          <a:xfrm>
+            <a:off x="365760" y="1188720"/>
+            <a:ext cx="5486400" cy="4114800"/>
+          </a:xfrm>
+          <a:prstGeom prst="rect">
+            <a:avLst/>
+          </a:prstGeom>
+        </p:spPr>
+      </p:pic>
+      <p:sp>
+        <p:nvSpPr>
+          <p:cNvPr id="4" name="TextBox 3"/>
+          <p:cNvSpPr txBox="1"/>
+          <p:nvPr/>
+        </p:nvSpPr>
+        <p:spPr>
+          <a:xfrm>
+            <a:off x="6035040" y="1188720"/>
+            <a:ext cx="2743200" cy="5029200"/>
+          </a:xfrm>
+          <a:prstGeom prst="rect">
+            <a:avLst/>
+          </a:prstGeom>
+          <a:noFill/>
+        </p:spPr>
+        <p:txBody>
+          <a:bodyPr wrap="square">
+            <a:spAutoFit/>
+          </a:bodyPr>
+          <a:lstStyle/>
+          <a:p>
+            <a:pPr>
+              <a:defRPr sz="1400"/>
+            </a:pPr>
+            <a:r>
+              <a:t>- Over Time (Yes): hazard x2.20 (p=0.000)</a:t>
+            </a:r>
+          </a:p>
+          <a:p>
+            <a:pPr>
+              <a:defRPr sz="1400"/>
+            </a:pPr>
+            <a:r>
+              <a:t>- Age: hazard x0.97 (p=0.000)</a:t>
+            </a:r>
+          </a:p>
+          <a:p>
+            <a:pPr>
+              <a:defRPr sz="1400"/>
+            </a:pPr>
+            <a:r>
+              <a:t>- Job Level: hazard x0.75 (p=0.000)</a:t>
+            </a:r>
+          </a:p>
+          <a:p>
+            <a:pPr>
+              <a:defRPr sz="1400"/>
+            </a:pPr>
+            <a:r>
+              <a:t>- Num Companies Worked: hazard x1.09 (p=0.000)</a:t>
+            </a:r>
+          </a:p>
+          <a:p>
+            <a:pPr>
+              <a:defRPr sz="1400"/>
+            </a:pPr>
+            <a:r>
+              <a:t>- Monthly Income: hazard x1.00 (p=0.000)</a:t>
+            </a:r>
+          </a:p>
+          <a:p>
+            <a:pPr>
+              <a:defRPr sz="1400"/>
+            </a:pPr>
+            <a:r>
+              <a:t>- Years Since Last Promotion: hazard x0.95 (p=0.001)</a:t>
+            </a:r>
+          </a:p>
+        </p:txBody>
+      </p:sp>
+    </p:spTree>
+  </p:cSld>
+  <p:clrMapOvr>
+    <a:masterClrMapping/>
+  </p:clrMapOvr>
+</p:sld>
+</file>
+
+<file path=ppt/slides/slide4.xml><?xml version="1.0" encoding="utf-8"?>
+<p:sld xmlns:a="http://schemas.openxmlformats.org/drawingml/2006/main" xmlns:p="http://schemas.openxmlformats.org/presentationml/2006/main" xmlns:r="http://schemas.openxmlformats.org/officeDocument/2006/relationships">
+  <p:cSld>
+    <p:spTree>
+      <p:nvGrpSpPr>
+        <p:cNvPr id="1" name=""/>
+        <p:cNvGrpSpPr/>
+        <p:nvPr/>
+      </p:nvGrpSpPr>
+      <p:grpSpPr/>
+      <p:sp>
+        <p:nvSpPr>
+          <p:cNvPr id="2" name="TextBox 1"/>
+          <p:cNvSpPr txBox="1"/>
+          <p:nvPr/>
+        </p:nvSpPr>
+        <p:spPr>
+          <a:xfrm>
+            <a:off x="365760" y="274320"/>
+            <a:ext cx="8412480" cy="731520"/>
+          </a:xfrm>
+          <a:prstGeom prst="rect">
+            <a:avLst/>
+          </a:prstGeom>
+          <a:noFill/>
+        </p:spPr>
+        <p:txBody>
+          <a:bodyPr wrap="none">
+            <a:spAutoFit/>
+          </a:bodyPr>
+          <a:lstStyle/>
+          <a:p>
+            <a:pPr>
+              <a:defRPr sz="2800" b="1"/>
+            </a:pPr>
+            <a:r>
+              <a:t>Retention by Overtime Status</a:t>
             </a:r>
           </a:p>
         </p:txBody>
@@ -3477,8 +3500,8 @@
         </p:blipFill>
         <p:spPr>
           <a:xfrm>
-            <a:off x="457200" y="1371600"/>
-            <a:ext cx="4754880" cy="3566160"/>
+            <a:off x="365760" y="1188720"/>
+            <a:ext cx="5486400" cy="4114800"/>
           </a:xfrm>
           <a:prstGeom prst="rect">
             <a:avLst/>
@@ -3493,8 +3516,8 @@
         </p:nvSpPr>
         <p:spPr>
           <a:xfrm>
-            <a:off x="5486400" y="1371600"/>
-            <a:ext cx="3200400" cy="4572000"/>
+            <a:off x="6035040" y="1188720"/>
+            <a:ext cx="2743200" cy="5029200"/>
           </a:xfrm>
           <a:prstGeom prst="rect">
             <a:avLst/>
@@ -3506,21 +3529,12 @@
             <a:spAutoFit/>
           </a:bodyPr>
           <a:lstStyle/>
-          <a:p/>
-          <a:p>
-            <a:pPr>
-              <a:defRPr b="1" sz="1800"/>
-            </a:pPr>
-            <a:r>
-              <a:t>Results:</a:t>
-            </a:r>
-          </a:p>
           <a:p>
             <a:pPr>
               <a:defRPr sz="1400"/>
             </a:pPr>
             <a:r>
-              <a:t>Train C-index: 0.849</a:t>
+              <a:t>- Log-rank test p = 1.6e-19 -- the retention gap is statistically significant.</a:t>
             </a:r>
           </a:p>
           <a:p>
@@ -3528,56 +3542,231 @@
               <a:defRPr sz="1400"/>
             </a:pPr>
             <a:r>
-              <a:t>Test C-index: 0.846</a:t>
-            </a:r>
-          </a:p>
-          <a:p>
-            <a:br/>
+              <a:t>- Overtime is the single most directly actionable factor found.</a:t>
+            </a:r>
+          </a:p>
+        </p:txBody>
+      </p:sp>
+    </p:spTree>
+  </p:cSld>
+  <p:clrMapOvr>
+    <a:masterClrMapping/>
+  </p:clrMapOvr>
+</p:sld>
+</file>
+
+<file path=ppt/slides/slide5.xml><?xml version="1.0" encoding="utf-8"?>
+<p:sld xmlns:a="http://schemas.openxmlformats.org/drawingml/2006/main" xmlns:p="http://schemas.openxmlformats.org/presentationml/2006/main" xmlns:r="http://schemas.openxmlformats.org/officeDocument/2006/relationships">
+  <p:cSld>
+    <p:spTree>
+      <p:nvGrpSpPr>
+        <p:cNvPr id="1" name=""/>
+        <p:cNvGrpSpPr/>
+        <p:nvPr/>
+      </p:nvGrpSpPr>
+      <p:grpSpPr/>
+      <p:sp>
+        <p:nvSpPr>
+          <p:cNvPr id="2" name="TextBox 1"/>
+          <p:cNvSpPr txBox="1"/>
+          <p:nvPr/>
+        </p:nvSpPr>
+        <p:spPr>
+          <a:xfrm>
+            <a:off x="365760" y="274320"/>
+            <a:ext cx="8412480" cy="731520"/>
+          </a:xfrm>
+          <a:prstGeom prst="rect">
+            <a:avLst/>
+          </a:prstGeom>
+          <a:noFill/>
+        </p:spPr>
+        <p:txBody>
+          <a:bodyPr wrap="none">
+            <a:spAutoFit/>
+          </a:bodyPr>
+          <a:lstStyle/>
+          <a:p>
             <a:pPr>
-              <a:defRPr b="1" sz="1800"/>
+              <a:defRPr sz="2800" b="1"/>
             </a:pPr>
             <a:r>
-              <a:t>Key Remarks:</a:t>
-            </a:r>
-          </a:p>
+              <a:t>Who Is at Risk Right Now</a:t>
+            </a:r>
+          </a:p>
+        </p:txBody>
+      </p:sp>
+      <p:pic>
+        <p:nvPicPr>
+          <p:cNvPr id="3" name="Picture 2" descr="risk_distribution.png"/>
+          <p:cNvPicPr>
+            <a:picLocks noChangeAspect="1"/>
+          </p:cNvPicPr>
+          <p:nvPr/>
+        </p:nvPicPr>
+        <p:blipFill>
+          <a:blip r:embed="rId2"/>
+          <a:stretch>
+            <a:fillRect/>
+          </a:stretch>
+        </p:blipFill>
+        <p:spPr>
+          <a:xfrm>
+            <a:off x="365760" y="1188720"/>
+            <a:ext cx="5486400" cy="1959429"/>
+          </a:xfrm>
+          <a:prstGeom prst="rect">
+            <a:avLst/>
+          </a:prstGeom>
+        </p:spPr>
+      </p:pic>
+      <p:sp>
+        <p:nvSpPr>
+          <p:cNvPr id="4" name="TextBox 3"/>
+          <p:cNvSpPr txBox="1"/>
+          <p:nvPr/>
+        </p:nvSpPr>
+        <p:spPr>
+          <a:xfrm>
+            <a:off x="6035040" y="1188720"/>
+            <a:ext cx="2743200" cy="5029200"/>
+          </a:xfrm>
+          <a:prstGeom prst="rect">
+            <a:avLst/>
+          </a:prstGeom>
+          <a:noFill/>
+        </p:spPr>
+        <p:txBody>
+          <a:bodyPr wrap="square">
+            <a:spAutoFit/>
+          </a:bodyPr>
+          <a:lstStyle/>
           <a:p>
             <a:pPr>
-              <a:defRPr sz="1300"/>
+              <a:defRPr sz="1400"/>
             </a:pPr>
             <a:r>
-              <a:t>Over Time (Yes) raises the hazard of leaving by 101%.</a:t>
+              <a:t>- 1233 current employees scored; top 15 shown ranked by 1-year leave probability.</a:t>
             </a:r>
           </a:p>
           <a:p>
             <a:pPr>
-              <a:defRPr sz="1300"/>
+              <a:defRPr sz="1400"/>
             </a:pPr>
             <a:r>
-              <a:t>Marital Status Single raises the hazard of leaving by 43%.</a:t>
-            </a:r>
-          </a:p>
+              <a:t>- Highest risk score: 8.19 vs. median 0.98.</a:t>
+            </a:r>
+          </a:p>
+        </p:txBody>
+      </p:sp>
+    </p:spTree>
+  </p:cSld>
+  <p:clrMapOvr>
+    <a:masterClrMapping/>
+  </p:clrMapOvr>
+</p:sld>
+</file>
+
+<file path=ppt/slides/slide6.xml><?xml version="1.0" encoding="utf-8"?>
+<p:sld xmlns:a="http://schemas.openxmlformats.org/drawingml/2006/main" xmlns:p="http://schemas.openxmlformats.org/presentationml/2006/main" xmlns:r="http://schemas.openxmlformats.org/officeDocument/2006/relationships">
+  <p:cSld>
+    <p:spTree>
+      <p:nvGrpSpPr>
+        <p:cNvPr id="1" name=""/>
+        <p:cNvGrpSpPr/>
+        <p:nvPr/>
+      </p:nvGrpSpPr>
+      <p:grpSpPr/>
+      <p:sp>
+        <p:nvSpPr>
+          <p:cNvPr id="2" name="TextBox 1"/>
+          <p:cNvSpPr txBox="1"/>
+          <p:nvPr/>
+        </p:nvSpPr>
+        <p:spPr>
+          <a:xfrm>
+            <a:off x="365760" y="274320"/>
+            <a:ext cx="8412480" cy="731520"/>
+          </a:xfrm>
+          <a:prstGeom prst="rect">
+            <a:avLst/>
+          </a:prstGeom>
+          <a:noFill/>
+        </p:spPr>
+        <p:txBody>
+          <a:bodyPr wrap="none">
+            <a:spAutoFit/>
+          </a:bodyPr>
+          <a:lstStyle/>
           <a:p>
             <a:pPr>
-              <a:defRPr sz="1300"/>
+              <a:defRPr sz="2800" b="1"/>
             </a:pPr>
             <a:r>
-              <a:t>Num Companies Worked raises the hazard of leaving by 9%.</a:t>
-            </a:r>
-          </a:p>
+              <a:t>Recommendations</a:t>
+            </a:r>
+          </a:p>
+        </p:txBody>
+      </p:sp>
+      <p:sp>
+        <p:nvSpPr>
+          <p:cNvPr id="3" name="TextBox 2"/>
+          <p:cNvSpPr txBox="1"/>
+          <p:nvPr/>
+        </p:nvSpPr>
+        <p:spPr>
+          <a:xfrm>
+            <a:off x="548640" y="1188720"/>
+            <a:ext cx="2743200" cy="5029200"/>
+          </a:xfrm>
+          <a:prstGeom prst="rect">
+            <a:avLst/>
+          </a:prstGeom>
+          <a:noFill/>
+        </p:spPr>
+        <p:txBody>
+          <a:bodyPr wrap="square">
+            <a:spAutoFit/>
+          </a:bodyPr>
+          <a:lstStyle/>
           <a:p>
             <a:pPr>
-              <a:defRPr sz="1300"/>
+              <a:defRPr sz="1400"/>
             </a:pPr>
             <a:r>
-              <a:t>Test concordance index: 0.846 (0.5 = random, 1.0 = perfect ranking).</a:t>
+              <a:t>- Prioritize retention conversations with the top 15 employees flagged above.</a:t>
             </a:r>
           </a:p>
           <a:p>
             <a:pPr>
-              <a:defRPr sz="1300"/>
+              <a:defRPr sz="1400"/>
             </a:pPr>
             <a:r>
-              <a:t>Overtime vs. no-overtime retention gap is statistically significant (log-rank p = 1.6e-19).</a:t>
+              <a:t>- Address Over Time (Yes): raises hazard by 120%.</a:t>
+            </a:r>
+          </a:p>
+          <a:p>
+            <a:pPr>
+              <a:defRPr sz="1400"/>
+            </a:pPr>
+            <a:r>
+              <a:t>- Age is protective: lowers hazard by 3%.</a:t>
+            </a:r>
+          </a:p>
+          <a:p>
+            <a:pPr>
+              <a:defRPr sz="1400"/>
+            </a:pPr>
+            <a:r>
+              <a:t>- Job Level is protective: lowers hazard by 25%.</a:t>
+            </a:r>
+          </a:p>
+          <a:p>
+            <a:pPr>
+              <a:defRPr sz="1400"/>
+            </a:pPr>
+            <a:r>
+              <a:t>- Address Num Companies Worked: raises hazard by 9%.</a:t>
             </a:r>
           </a:p>
         </p:txBody>

--- a/Project/Forecasting & Predictive Modeling/Headcount Attrition - Survival Analysis/result/slides/Executive_Attrition_Report.pptx
+++ b/Project/Forecasting & Predictive Modeling/Headcount Attrition - Survival Analysis/result/slides/Executive_Attrition_Report.pptx
@@ -5,12 +5,11 @@
     <p:sldMasterId id="2147483648" r:id="rId1"/>
   </p:sldMasterIdLst>
   <p:sldIdLst>
-    <p:sldId id="256" r:id="rId7"/>
-    <p:sldId id="257" r:id="rId8"/>
-    <p:sldId id="258" r:id="rId9"/>
-    <p:sldId id="259" r:id="rId10"/>
-    <p:sldId id="260" r:id="rId11"/>
-    <p:sldId id="261" r:id="rId12"/>
+    <p:sldId id="263" r:id="rId2"/>
+    <p:sldId id="264" r:id="rId3"/>
+    <p:sldId id="265" r:id="rId4"/>
+    <p:sldId id="266" r:id="rId5"/>
+    <p:sldId id="267" r:id="rId6"/>
   </p:sldIdLst>
   <p:sldSz cx="9144000" cy="6858000" type="screen4x3"/>
   <p:notesSz cx="6858000" cy="9144000"/>
@@ -109,7 +108,273 @@
       </a:defRPr>
     </a:lvl9pPr>
   </p:defaultTextStyle>
+  <p:extLst>
+    <p:ext uri="{EFAFB233-063F-42B5-8137-9DF3F51BA10A}">
+      <p15:sldGuideLst xmlns:p15="http://schemas.microsoft.com/office/powerpoint/2012/main">
+        <p15:guide id="1" orient="horz" pos="2160">
+          <p15:clr>
+            <a:srgbClr val="A4A3A4"/>
+          </p15:clr>
+        </p15:guide>
+        <p15:guide id="2" pos="2880">
+          <p15:clr>
+            <a:srgbClr val="A4A3A4"/>
+          </p15:clr>
+        </p15:guide>
+      </p15:sldGuideLst>
+    </p:ext>
+  </p:extLst>
 </p:presentation>
+</file>
+
+<file path=ppt/revisionInfo.xml><?xml version="1.0" encoding="utf-8"?>
+<p1510:revInfo xmlns:a="http://schemas.openxmlformats.org/drawingml/2006/main" xmlns:r="http://schemas.openxmlformats.org/officeDocument/2006/relationships" xmlns:p1510="http://schemas.microsoft.com/office/powerpoint/2015/10/main">
+  <p1510:revLst>
+    <p1510:client id="{FD052826-8610-49D1-8D95-C408E5538021}" v="1" dt="2026-08-30T05:08:24.766"/>
+  </p1510:revLst>
+</p1510:revInfo>
+</file>
+
+<file path=ppt/changesInfos/changesInfo1.xml><?xml version="1.0" encoding="utf-8"?>
+<pc:chgInfo xmlns:a="http://schemas.openxmlformats.org/drawingml/2006/main" xmlns:r="http://schemas.openxmlformats.org/officeDocument/2006/relationships" xmlns:ac="http://schemas.microsoft.com/office/drawing/2013/main/command" xmlns:pc="http://schemas.microsoft.com/office/powerpoint/2013/main/command">
+  <pc:docChgLst>
+    <pc:chgData name="Nick Wisely" userId="a459e8a3726ef50c" providerId="LiveId" clId="{19D5AA45-A625-4438-8C3B-94A22A51738B}"/>
+    <pc:docChg chg="custSel addSld delSld modSld">
+      <pc:chgData name="Nick Wisely" userId="a459e8a3726ef50c" providerId="LiveId" clId="{19D5AA45-A625-4438-8C3B-94A22A51738B}" dt="2026-08-30T05:18:28.191" v="43"/>
+      <pc:docMkLst>
+        <pc:docMk/>
+      </pc:docMkLst>
+      <pc:sldChg chg="del">
+        <pc:chgData name="Nick Wisely" userId="a459e8a3726ef50c" providerId="LiveId" clId="{19D5AA45-A625-4438-8C3B-94A22A51738B}" dt="2026-08-30T05:14:24.016" v="9"/>
+        <pc:sldMkLst>
+          <pc:docMk/>
+          <pc:sldMk cId="0" sldId="256"/>
+        </pc:sldMkLst>
+      </pc:sldChg>
+      <pc:sldChg chg="del">
+        <pc:chgData name="Nick Wisely" userId="a459e8a3726ef50c" providerId="LiveId" clId="{19D5AA45-A625-4438-8C3B-94A22A51738B}" dt="2026-08-30T05:14:46.610" v="16"/>
+        <pc:sldMkLst>
+          <pc:docMk/>
+          <pc:sldMk cId="0" sldId="257"/>
+        </pc:sldMkLst>
+      </pc:sldChg>
+      <pc:sldChg chg="del">
+        <pc:chgData name="Nick Wisely" userId="a459e8a3726ef50c" providerId="LiveId" clId="{19D5AA45-A625-4438-8C3B-94A22A51738B}" dt="2026-08-30T05:15:45.314" v="18"/>
+        <pc:sldMkLst>
+          <pc:docMk/>
+          <pc:sldMk cId="0" sldId="258"/>
+        </pc:sldMkLst>
+      </pc:sldChg>
+      <pc:sldChg chg="del">
+        <pc:chgData name="Nick Wisely" userId="a459e8a3726ef50c" providerId="LiveId" clId="{19D5AA45-A625-4438-8C3B-94A22A51738B}" dt="2026-08-30T05:16:50.708" v="24"/>
+        <pc:sldMkLst>
+          <pc:docMk/>
+          <pc:sldMk cId="0" sldId="259"/>
+        </pc:sldMkLst>
+      </pc:sldChg>
+      <pc:sldChg chg="del">
+        <pc:chgData name="Nick Wisely" userId="a459e8a3726ef50c" providerId="LiveId" clId="{19D5AA45-A625-4438-8C3B-94A22A51738B}" dt="2026-08-30T05:17:57.828" v="31"/>
+        <pc:sldMkLst>
+          <pc:docMk/>
+          <pc:sldMk cId="0" sldId="260"/>
+        </pc:sldMkLst>
+      </pc:sldChg>
+      <pc:sldChg chg="del">
+        <pc:chgData name="Nick Wisely" userId="a459e8a3726ef50c" providerId="LiveId" clId="{19D5AA45-A625-4438-8C3B-94A22A51738B}" dt="2026-08-30T05:11:09.568" v="1"/>
+        <pc:sldMkLst>
+          <pc:docMk/>
+          <pc:sldMk cId="0" sldId="261"/>
+        </pc:sldMkLst>
+      </pc:sldChg>
+      <pc:sldChg chg="modSp add del mod">
+        <pc:chgData name="Nick Wisely" userId="a459e8a3726ef50c" providerId="LiveId" clId="{19D5AA45-A625-4438-8C3B-94A22A51738B}" dt="2026-08-30T05:18:07.159" v="39"/>
+        <pc:sldMkLst>
+          <pc:docMk/>
+          <pc:sldMk cId="3492292071" sldId="262"/>
+        </pc:sldMkLst>
+        <pc:spChg chg="mod">
+          <ac:chgData name="Nick Wisely" userId="a459e8a3726ef50c" providerId="LiveId" clId="{19D5AA45-A625-4438-8C3B-94A22A51738B}" dt="2026-08-30T05:11:10.143" v="5"/>
+          <ac:spMkLst>
+            <pc:docMk/>
+            <pc:sldMk cId="3492292071" sldId="262"/>
+            <ac:spMk id="2" creationId="{00000000-0000-0000-0000-000000000000}"/>
+          </ac:spMkLst>
+        </pc:spChg>
+        <pc:spChg chg="mod">
+          <ac:chgData name="Nick Wisely" userId="a459e8a3726ef50c" providerId="LiveId" clId="{19D5AA45-A625-4438-8C3B-94A22A51738B}" dt="2026-08-30T05:11:10.147" v="7"/>
+          <ac:spMkLst>
+            <pc:docMk/>
+            <pc:sldMk cId="3492292071" sldId="262"/>
+            <ac:spMk id="3" creationId="{00000000-0000-0000-0000-000000000000}"/>
+          </ac:spMkLst>
+        </pc:spChg>
+        <pc:spChg chg="mod">
+          <ac:chgData name="Nick Wisely" userId="a459e8a3726ef50c" providerId="LiveId" clId="{19D5AA45-A625-4438-8C3B-94A22A51738B}" dt="2026-08-30T05:11:09.598" v="3" actId="27636"/>
+          <ac:spMkLst>
+            <pc:docMk/>
+            <pc:sldMk cId="3492292071" sldId="262"/>
+            <ac:spMk id="102" creationId="{00000000-0000-0000-0000-000000000000}"/>
+          </ac:spMkLst>
+        </pc:spChg>
+        <pc:spChg chg="mod">
+          <ac:chgData name="Nick Wisely" userId="a459e8a3726ef50c" providerId="LiveId" clId="{19D5AA45-A625-4438-8C3B-94A22A51738B}" dt="2026-08-30T05:11:09.593" v="2" actId="27636"/>
+          <ac:spMkLst>
+            <pc:docMk/>
+            <pc:sldMk cId="3492292071" sldId="262"/>
+            <ac:spMk id="115" creationId="{00000000-0000-0000-0000-000000000000}"/>
+          </ac:spMkLst>
+        </pc:spChg>
+      </pc:sldChg>
+      <pc:sldChg chg="modSp add mod">
+        <pc:chgData name="Nick Wisely" userId="a459e8a3726ef50c" providerId="LiveId" clId="{19D5AA45-A625-4438-8C3B-94A22A51738B}" dt="2026-08-30T05:14:24.608" v="15"/>
+        <pc:sldMkLst>
+          <pc:docMk/>
+          <pc:sldMk cId="1568335212" sldId="263"/>
+        </pc:sldMkLst>
+        <pc:spChg chg="mod">
+          <ac:chgData name="Nick Wisely" userId="a459e8a3726ef50c" providerId="LiveId" clId="{19D5AA45-A625-4438-8C3B-94A22A51738B}" dt="2026-08-30T05:14:24.604" v="13"/>
+          <ac:spMkLst>
+            <pc:docMk/>
+            <pc:sldMk cId="1568335212" sldId="263"/>
+            <ac:spMk id="2" creationId="{00000000-0000-0000-0000-000000000000}"/>
+          </ac:spMkLst>
+        </pc:spChg>
+        <pc:spChg chg="mod">
+          <ac:chgData name="Nick Wisely" userId="a459e8a3726ef50c" providerId="LiveId" clId="{19D5AA45-A625-4438-8C3B-94A22A51738B}" dt="2026-08-30T05:14:24.608" v="15"/>
+          <ac:spMkLst>
+            <pc:docMk/>
+            <pc:sldMk cId="1568335212" sldId="263"/>
+            <ac:spMk id="3" creationId="{00000000-0000-0000-0000-000000000000}"/>
+          </ac:spMkLst>
+        </pc:spChg>
+        <pc:spChg chg="mod">
+          <ac:chgData name="Nick Wisely" userId="a459e8a3726ef50c" providerId="LiveId" clId="{19D5AA45-A625-4438-8C3B-94A22A51738B}" dt="2026-08-30T05:14:24.088" v="11" actId="27636"/>
+          <ac:spMkLst>
+            <pc:docMk/>
+            <pc:sldMk cId="1568335212" sldId="263"/>
+            <ac:spMk id="202" creationId="{00000000-0000-0000-0000-000000000000}"/>
+          </ac:spMkLst>
+        </pc:spChg>
+        <pc:spChg chg="mod">
+          <ac:chgData name="Nick Wisely" userId="a459e8a3726ef50c" providerId="LiveId" clId="{19D5AA45-A625-4438-8C3B-94A22A51738B}" dt="2026-08-30T05:14:24.078" v="10" actId="27636"/>
+          <ac:spMkLst>
+            <pc:docMk/>
+            <pc:sldMk cId="1568335212" sldId="263"/>
+            <ac:spMk id="203" creationId="{00000000-0000-0000-0000-000000000000}"/>
+          </ac:spMkLst>
+        </pc:spChg>
+      </pc:sldChg>
+      <pc:sldChg chg="modSp add mod">
+        <pc:chgData name="Nick Wisely" userId="a459e8a3726ef50c" providerId="LiveId" clId="{19D5AA45-A625-4438-8C3B-94A22A51738B}" dt="2026-08-30T05:15:45.338" v="22"/>
+        <pc:sldMkLst>
+          <pc:docMk/>
+          <pc:sldMk cId="3097959283" sldId="264"/>
+        </pc:sldMkLst>
+        <pc:spChg chg="mod">
+          <ac:chgData name="Nick Wisely" userId="a459e8a3726ef50c" providerId="LiveId" clId="{19D5AA45-A625-4438-8C3B-94A22A51738B}" dt="2026-08-30T05:15:45.338" v="20"/>
+          <ac:spMkLst>
+            <pc:docMk/>
+            <pc:sldMk cId="3097959283" sldId="264"/>
+            <ac:spMk id="2" creationId="{00000000-0000-0000-0000-000000000000}"/>
+          </ac:spMkLst>
+        </pc:spChg>
+        <pc:spChg chg="mod">
+          <ac:chgData name="Nick Wisely" userId="a459e8a3726ef50c" providerId="LiveId" clId="{19D5AA45-A625-4438-8C3B-94A22A51738B}" dt="2026-08-30T05:15:45.338" v="22"/>
+          <ac:spMkLst>
+            <pc:docMk/>
+            <pc:sldMk cId="3097959283" sldId="264"/>
+            <ac:spMk id="4" creationId="{00000000-0000-0000-0000-000000000000}"/>
+          </ac:spMkLst>
+        </pc:spChg>
+      </pc:sldChg>
+      <pc:sldChg chg="modSp add mod">
+        <pc:chgData name="Nick Wisely" userId="a459e8a3726ef50c" providerId="LiveId" clId="{19D5AA45-A625-4438-8C3B-94A22A51738B}" dt="2026-08-30T05:16:50.794" v="29"/>
+        <pc:sldMkLst>
+          <pc:docMk/>
+          <pc:sldMk cId="2411773813" sldId="265"/>
+        </pc:sldMkLst>
+        <pc:spChg chg="mod">
+          <ac:chgData name="Nick Wisely" userId="a459e8a3726ef50c" providerId="LiveId" clId="{19D5AA45-A625-4438-8C3B-94A22A51738B}" dt="2026-08-30T05:16:50.790" v="27"/>
+          <ac:spMkLst>
+            <pc:docMk/>
+            <pc:sldMk cId="2411773813" sldId="265"/>
+            <ac:spMk id="2" creationId="{00000000-0000-0000-0000-000000000000}"/>
+          </ac:spMkLst>
+        </pc:spChg>
+        <pc:spChg chg="mod">
+          <ac:chgData name="Nick Wisely" userId="a459e8a3726ef50c" providerId="LiveId" clId="{19D5AA45-A625-4438-8C3B-94A22A51738B}" dt="2026-08-30T05:16:50.794" v="29"/>
+          <ac:spMkLst>
+            <pc:docMk/>
+            <pc:sldMk cId="2411773813" sldId="265"/>
+            <ac:spMk id="4" creationId="{00000000-0000-0000-0000-000000000000}"/>
+          </ac:spMkLst>
+        </pc:spChg>
+        <pc:spChg chg="mod">
+          <ac:chgData name="Nick Wisely" userId="a459e8a3726ef50c" providerId="LiveId" clId="{19D5AA45-A625-4438-8C3B-94A22A51738B}" dt="2026-08-30T05:16:50.758" v="25" actId="27636"/>
+          <ac:spMkLst>
+            <pc:docMk/>
+            <pc:sldMk cId="2411773813" sldId="265"/>
+            <ac:spMk id="411" creationId="{00000000-0000-0000-0000-000000000000}"/>
+          </ac:spMkLst>
+        </pc:spChg>
+      </pc:sldChg>
+      <pc:sldChg chg="modSp add mod">
+        <pc:chgData name="Nick Wisely" userId="a459e8a3726ef50c" providerId="LiveId" clId="{19D5AA45-A625-4438-8C3B-94A22A51738B}" dt="2026-08-30T05:18:28.191" v="43"/>
+        <pc:sldMkLst>
+          <pc:docMk/>
+          <pc:sldMk cId="4143077237" sldId="266"/>
+        </pc:sldMkLst>
+        <pc:spChg chg="mod">
+          <ac:chgData name="Nick Wisely" userId="a459e8a3726ef50c" providerId="LiveId" clId="{19D5AA45-A625-4438-8C3B-94A22A51738B}" dt="2026-08-30T05:17:57.911" v="35"/>
+          <ac:spMkLst>
+            <pc:docMk/>
+            <pc:sldMk cId="4143077237" sldId="266"/>
+            <ac:spMk id="2" creationId="{00000000-0000-0000-0000-000000000000}"/>
+          </ac:spMkLst>
+        </pc:spChg>
+        <pc:spChg chg="mod">
+          <ac:chgData name="Nick Wisely" userId="a459e8a3726ef50c" providerId="LiveId" clId="{19D5AA45-A625-4438-8C3B-94A22A51738B}" dt="2026-08-30T05:17:57.911" v="37"/>
+          <ac:spMkLst>
+            <pc:docMk/>
+            <pc:sldMk cId="4143077237" sldId="266"/>
+            <ac:spMk id="4" creationId="{00000000-0000-0000-0000-000000000000}"/>
+          </ac:spMkLst>
+        </pc:spChg>
+        <pc:spChg chg="mod">
+          <ac:chgData name="Nick Wisely" userId="a459e8a3726ef50c" providerId="LiveId" clId="{19D5AA45-A625-4438-8C3B-94A22A51738B}" dt="2026-08-30T05:17:57.848" v="32" actId="27636"/>
+          <ac:spMkLst>
+            <pc:docMk/>
+            <pc:sldMk cId="4143077237" sldId="266"/>
+            <ac:spMk id="502" creationId="{00000000-0000-0000-0000-000000000000}"/>
+          </ac:spMkLst>
+        </pc:spChg>
+        <pc:spChg chg="mod">
+          <ac:chgData name="Nick Wisely" userId="a459e8a3726ef50c" providerId="LiveId" clId="{19D5AA45-A625-4438-8C3B-94A22A51738B}" dt="2026-08-30T05:17:57.848" v="33" actId="27636"/>
+          <ac:spMkLst>
+            <pc:docMk/>
+            <pc:sldMk cId="4143077237" sldId="266"/>
+            <ac:spMk id="503" creationId="{00000000-0000-0000-0000-000000000000}"/>
+          </ac:spMkLst>
+        </pc:spChg>
+        <pc:picChg chg="mod">
+          <ac:chgData name="Nick Wisely" userId="a459e8a3726ef50c" providerId="LiveId" clId="{19D5AA45-A625-4438-8C3B-94A22A51738B}" dt="2026-08-30T05:18:28.191" v="43"/>
+          <ac:picMkLst>
+            <pc:docMk/>
+            <pc:sldMk cId="4143077237" sldId="266"/>
+            <ac:picMk id="3" creationId="{00000000-0000-0000-0000-000000000000}"/>
+          </ac:picMkLst>
+        </pc:picChg>
+      </pc:sldChg>
+      <pc:sldChg chg="add">
+        <pc:chgData name="Nick Wisely" userId="a459e8a3726ef50c" providerId="LiveId" clId="{19D5AA45-A625-4438-8C3B-94A22A51738B}" dt="2026-08-30T05:18:07.148" v="38"/>
+        <pc:sldMkLst>
+          <pc:docMk/>
+          <pc:sldMk cId="1500844885" sldId="267"/>
+        </pc:sldMkLst>
+      </pc:sldChg>
+    </pc:docChg>
+  </pc:docChgLst>
+</pc:chgInfo>
 </file>
 
 <file path=ppt/slideLayouts/slideLayout1.xml><?xml version="1.0" encoding="utf-8"?>
@@ -150,10 +415,9 @@
           <a:lstStyle/>
           <a:p>
             <a:r>
-              <a:rPr lang="en-US" smtClean="0"/>
+              <a:rPr lang="en-US"/>
               <a:t>Click to edit Master title style</a:t>
             </a:r>
-            <a:endParaRPr lang="en-US"/>
           </a:p>
         </p:txBody>
       </p:sp>
@@ -269,10 +533,9 @@
           </a:lstStyle>
           <a:p>
             <a:r>
-              <a:rPr lang="en-US" smtClean="0"/>
+              <a:rPr lang="en-US"/>
               <a:t>Click to edit Master subtitle style</a:t>
             </a:r>
-            <a:endParaRPr lang="en-US"/>
           </a:p>
         </p:txBody>
       </p:sp>
@@ -293,7 +556,7 @@
           <a:p>
             <a:fld id="{5BCAD085-E8A6-8845-BD4E-CB4CCA059FC4}" type="datetimeFigureOut">
               <a:rPr lang="en-US" smtClean="0"/>
-              <a:t>1/27/13</a:t>
+              <a:t>8/30/2026</a:t>
             </a:fld>
             <a:endParaRPr lang="en-US"/>
           </a:p>
@@ -387,10 +650,9 @@
           <a:lstStyle/>
           <a:p>
             <a:r>
-              <a:rPr lang="en-US" smtClean="0"/>
+              <a:rPr lang="en-US"/>
               <a:t>Click to edit Master title style</a:t>
             </a:r>
-            <a:endParaRPr lang="en-US"/>
           </a:p>
         </p:txBody>
       </p:sp>
@@ -411,38 +673,37 @@
           <a:p>
             <a:pPr lvl="0"/>
             <a:r>
-              <a:rPr lang="en-US" smtClean="0"/>
+              <a:rPr lang="en-US"/>
               <a:t>Click to edit Master text styles</a:t>
             </a:r>
           </a:p>
           <a:p>
             <a:pPr lvl="1"/>
             <a:r>
-              <a:rPr lang="en-US" smtClean="0"/>
+              <a:rPr lang="en-US"/>
               <a:t>Second level</a:t>
             </a:r>
           </a:p>
           <a:p>
             <a:pPr lvl="2"/>
             <a:r>
-              <a:rPr lang="en-US" smtClean="0"/>
+              <a:rPr lang="en-US"/>
               <a:t>Third level</a:t>
             </a:r>
           </a:p>
           <a:p>
             <a:pPr lvl="3"/>
             <a:r>
-              <a:rPr lang="en-US" smtClean="0"/>
+              <a:rPr lang="en-US"/>
               <a:t>Fourth level</a:t>
             </a:r>
           </a:p>
           <a:p>
             <a:pPr lvl="4"/>
             <a:r>
-              <a:rPr lang="en-US" smtClean="0"/>
+              <a:rPr lang="en-US"/>
               <a:t>Fifth level</a:t>
             </a:r>
-            <a:endParaRPr lang="en-US"/>
           </a:p>
         </p:txBody>
       </p:sp>
@@ -463,7 +724,7 @@
           <a:p>
             <a:fld id="{5BCAD085-E8A6-8845-BD4E-CB4CCA059FC4}" type="datetimeFigureOut">
               <a:rPr lang="en-US" smtClean="0"/>
-              <a:t>1/27/13</a:t>
+              <a:t>8/30/2026</a:t>
             </a:fld>
             <a:endParaRPr lang="en-US"/>
           </a:p>
@@ -562,10 +823,9 @@
           <a:lstStyle/>
           <a:p>
             <a:r>
-              <a:rPr lang="en-US" smtClean="0"/>
+              <a:rPr lang="en-US"/>
               <a:t>Click to edit Master title style</a:t>
             </a:r>
-            <a:endParaRPr lang="en-US"/>
           </a:p>
         </p:txBody>
       </p:sp>
@@ -591,38 +851,37 @@
           <a:p>
             <a:pPr lvl="0"/>
             <a:r>
-              <a:rPr lang="en-US" smtClean="0"/>
+              <a:rPr lang="en-US"/>
               <a:t>Click to edit Master text styles</a:t>
             </a:r>
           </a:p>
           <a:p>
             <a:pPr lvl="1"/>
             <a:r>
-              <a:rPr lang="en-US" smtClean="0"/>
+              <a:rPr lang="en-US"/>
               <a:t>Second level</a:t>
             </a:r>
           </a:p>
           <a:p>
             <a:pPr lvl="2"/>
             <a:r>
-              <a:rPr lang="en-US" smtClean="0"/>
+              <a:rPr lang="en-US"/>
               <a:t>Third level</a:t>
             </a:r>
           </a:p>
           <a:p>
             <a:pPr lvl="3"/>
             <a:r>
-              <a:rPr lang="en-US" smtClean="0"/>
+              <a:rPr lang="en-US"/>
               <a:t>Fourth level</a:t>
             </a:r>
           </a:p>
           <a:p>
             <a:pPr lvl="4"/>
             <a:r>
-              <a:rPr lang="en-US" smtClean="0"/>
+              <a:rPr lang="en-US"/>
               <a:t>Fifth level</a:t>
             </a:r>
-            <a:endParaRPr lang="en-US"/>
           </a:p>
         </p:txBody>
       </p:sp>
@@ -643,7 +902,7 @@
           <a:p>
             <a:fld id="{5BCAD085-E8A6-8845-BD4E-CB4CCA059FC4}" type="datetimeFigureOut">
               <a:rPr lang="en-US" smtClean="0"/>
-              <a:t>1/27/13</a:t>
+              <a:t>8/30/2026</a:t>
             </a:fld>
             <a:endParaRPr lang="en-US"/>
           </a:p>
@@ -737,10 +996,9 @@
           <a:lstStyle/>
           <a:p>
             <a:r>
-              <a:rPr lang="en-US" smtClean="0"/>
+              <a:rPr lang="en-US"/>
               <a:t>Click to edit Master title style</a:t>
             </a:r>
-            <a:endParaRPr lang="en-US"/>
           </a:p>
         </p:txBody>
       </p:sp>
@@ -761,38 +1019,37 @@
           <a:p>
             <a:pPr lvl="0"/>
             <a:r>
-              <a:rPr lang="en-US" smtClean="0"/>
+              <a:rPr lang="en-US"/>
               <a:t>Click to edit Master text styles</a:t>
             </a:r>
           </a:p>
           <a:p>
             <a:pPr lvl="1"/>
             <a:r>
-              <a:rPr lang="en-US" smtClean="0"/>
+              <a:rPr lang="en-US"/>
               <a:t>Second level</a:t>
             </a:r>
           </a:p>
           <a:p>
             <a:pPr lvl="2"/>
             <a:r>
-              <a:rPr lang="en-US" smtClean="0"/>
+              <a:rPr lang="en-US"/>
               <a:t>Third level</a:t>
             </a:r>
           </a:p>
           <a:p>
             <a:pPr lvl="3"/>
             <a:r>
-              <a:rPr lang="en-US" smtClean="0"/>
+              <a:rPr lang="en-US"/>
               <a:t>Fourth level</a:t>
             </a:r>
           </a:p>
           <a:p>
             <a:pPr lvl="4"/>
             <a:r>
-              <a:rPr lang="en-US" smtClean="0"/>
+              <a:rPr lang="en-US"/>
               <a:t>Fifth level</a:t>
             </a:r>
-            <a:endParaRPr lang="en-US"/>
           </a:p>
         </p:txBody>
       </p:sp>
@@ -813,7 +1070,7 @@
           <a:p>
             <a:fld id="{5BCAD085-E8A6-8845-BD4E-CB4CCA059FC4}" type="datetimeFigureOut">
               <a:rPr lang="en-US" smtClean="0"/>
-              <a:t>1/27/13</a:t>
+              <a:t>8/30/2026</a:t>
             </a:fld>
             <a:endParaRPr lang="en-US"/>
           </a:p>
@@ -916,10 +1173,9 @@
           </a:lstStyle>
           <a:p>
             <a:r>
-              <a:rPr lang="en-US" smtClean="0"/>
+              <a:rPr lang="en-US"/>
               <a:t>Click to edit Master title style</a:t>
             </a:r>
-            <a:endParaRPr lang="en-US"/>
           </a:p>
         </p:txBody>
       </p:sp>
@@ -1036,7 +1292,7 @@
           <a:p>
             <a:pPr lvl="0"/>
             <a:r>
-              <a:rPr lang="en-US" smtClean="0"/>
+              <a:rPr lang="en-US"/>
               <a:t>Click to edit Master text styles</a:t>
             </a:r>
           </a:p>
@@ -1059,7 +1315,7 @@
           <a:p>
             <a:fld id="{5BCAD085-E8A6-8845-BD4E-CB4CCA059FC4}" type="datetimeFigureOut">
               <a:rPr lang="en-US" smtClean="0"/>
-              <a:t>1/27/13</a:t>
+              <a:t>8/30/2026</a:t>
             </a:fld>
             <a:endParaRPr lang="en-US"/>
           </a:p>
@@ -1153,10 +1409,9 @@
           <a:lstStyle/>
           <a:p>
             <a:r>
-              <a:rPr lang="en-US" smtClean="0"/>
+              <a:rPr lang="en-US"/>
               <a:t>Click to edit Master title style</a:t>
             </a:r>
-            <a:endParaRPr lang="en-US"/>
           </a:p>
         </p:txBody>
       </p:sp>
@@ -1210,38 +1465,37 @@
           <a:p>
             <a:pPr lvl="0"/>
             <a:r>
-              <a:rPr lang="en-US" smtClean="0"/>
+              <a:rPr lang="en-US"/>
               <a:t>Click to edit Master text styles</a:t>
             </a:r>
           </a:p>
           <a:p>
             <a:pPr lvl="1"/>
             <a:r>
-              <a:rPr lang="en-US" smtClean="0"/>
+              <a:rPr lang="en-US"/>
               <a:t>Second level</a:t>
             </a:r>
           </a:p>
           <a:p>
             <a:pPr lvl="2"/>
             <a:r>
-              <a:rPr lang="en-US" smtClean="0"/>
+              <a:rPr lang="en-US"/>
               <a:t>Third level</a:t>
             </a:r>
           </a:p>
           <a:p>
             <a:pPr lvl="3"/>
             <a:r>
-              <a:rPr lang="en-US" smtClean="0"/>
+              <a:rPr lang="en-US"/>
               <a:t>Fourth level</a:t>
             </a:r>
           </a:p>
           <a:p>
             <a:pPr lvl="4"/>
             <a:r>
-              <a:rPr lang="en-US" smtClean="0"/>
+              <a:rPr lang="en-US"/>
               <a:t>Fifth level</a:t>
             </a:r>
-            <a:endParaRPr lang="en-US"/>
           </a:p>
         </p:txBody>
       </p:sp>
@@ -1295,38 +1549,37 @@
           <a:p>
             <a:pPr lvl="0"/>
             <a:r>
-              <a:rPr lang="en-US" smtClean="0"/>
+              <a:rPr lang="en-US"/>
               <a:t>Click to edit Master text styles</a:t>
             </a:r>
           </a:p>
           <a:p>
             <a:pPr lvl="1"/>
             <a:r>
-              <a:rPr lang="en-US" smtClean="0"/>
+              <a:rPr lang="en-US"/>
               <a:t>Second level</a:t>
             </a:r>
           </a:p>
           <a:p>
             <a:pPr lvl="2"/>
             <a:r>
-              <a:rPr lang="en-US" smtClean="0"/>
+              <a:rPr lang="en-US"/>
               <a:t>Third level</a:t>
             </a:r>
           </a:p>
           <a:p>
             <a:pPr lvl="3"/>
             <a:r>
-              <a:rPr lang="en-US" smtClean="0"/>
+              <a:rPr lang="en-US"/>
               <a:t>Fourth level</a:t>
             </a:r>
           </a:p>
           <a:p>
             <a:pPr lvl="4"/>
             <a:r>
-              <a:rPr lang="en-US" smtClean="0"/>
+              <a:rPr lang="en-US"/>
               <a:t>Fifth level</a:t>
             </a:r>
-            <a:endParaRPr lang="en-US"/>
           </a:p>
         </p:txBody>
       </p:sp>
@@ -1347,7 +1600,7 @@
           <a:p>
             <a:fld id="{5BCAD085-E8A6-8845-BD4E-CB4CCA059FC4}" type="datetimeFigureOut">
               <a:rPr lang="en-US" smtClean="0"/>
-              <a:t>1/27/13</a:t>
+              <a:t>8/30/2026</a:t>
             </a:fld>
             <a:endParaRPr lang="en-US"/>
           </a:p>
@@ -1445,10 +1698,9 @@
           </a:lstStyle>
           <a:p>
             <a:r>
-              <a:rPr lang="en-US" smtClean="0"/>
+              <a:rPr lang="en-US"/>
               <a:t>Click to edit Master title style</a:t>
             </a:r>
-            <a:endParaRPr lang="en-US"/>
           </a:p>
         </p:txBody>
       </p:sp>
@@ -1511,7 +1763,7 @@
           <a:p>
             <a:pPr lvl="0"/>
             <a:r>
-              <a:rPr lang="en-US" smtClean="0"/>
+              <a:rPr lang="en-US"/>
               <a:t>Click to edit Master text styles</a:t>
             </a:r>
           </a:p>
@@ -1567,38 +1819,37 @@
           <a:p>
             <a:pPr lvl="0"/>
             <a:r>
-              <a:rPr lang="en-US" smtClean="0"/>
+              <a:rPr lang="en-US"/>
               <a:t>Click to edit Master text styles</a:t>
             </a:r>
           </a:p>
           <a:p>
             <a:pPr lvl="1"/>
             <a:r>
-              <a:rPr lang="en-US" smtClean="0"/>
+              <a:rPr lang="en-US"/>
               <a:t>Second level</a:t>
             </a:r>
           </a:p>
           <a:p>
             <a:pPr lvl="2"/>
             <a:r>
-              <a:rPr lang="en-US" smtClean="0"/>
+              <a:rPr lang="en-US"/>
               <a:t>Third level</a:t>
             </a:r>
           </a:p>
           <a:p>
             <a:pPr lvl="3"/>
             <a:r>
-              <a:rPr lang="en-US" smtClean="0"/>
+              <a:rPr lang="en-US"/>
               <a:t>Fourth level</a:t>
             </a:r>
           </a:p>
           <a:p>
             <a:pPr lvl="4"/>
             <a:r>
-              <a:rPr lang="en-US" smtClean="0"/>
+              <a:rPr lang="en-US"/>
               <a:t>Fifth level</a:t>
             </a:r>
-            <a:endParaRPr lang="en-US"/>
           </a:p>
         </p:txBody>
       </p:sp>
@@ -1661,7 +1912,7 @@
           <a:p>
             <a:pPr lvl="0"/>
             <a:r>
-              <a:rPr lang="en-US" smtClean="0"/>
+              <a:rPr lang="en-US"/>
               <a:t>Click to edit Master text styles</a:t>
             </a:r>
           </a:p>
@@ -1717,38 +1968,37 @@
           <a:p>
             <a:pPr lvl="0"/>
             <a:r>
-              <a:rPr lang="en-US" smtClean="0"/>
+              <a:rPr lang="en-US"/>
               <a:t>Click to edit Master text styles</a:t>
             </a:r>
           </a:p>
           <a:p>
             <a:pPr lvl="1"/>
             <a:r>
-              <a:rPr lang="en-US" smtClean="0"/>
+              <a:rPr lang="en-US"/>
               <a:t>Second level</a:t>
             </a:r>
           </a:p>
           <a:p>
             <a:pPr lvl="2"/>
             <a:r>
-              <a:rPr lang="en-US" smtClean="0"/>
+              <a:rPr lang="en-US"/>
               <a:t>Third level</a:t>
             </a:r>
           </a:p>
           <a:p>
             <a:pPr lvl="3"/>
             <a:r>
-              <a:rPr lang="en-US" smtClean="0"/>
+              <a:rPr lang="en-US"/>
               <a:t>Fourth level</a:t>
             </a:r>
           </a:p>
           <a:p>
             <a:pPr lvl="4"/>
             <a:r>
-              <a:rPr lang="en-US" smtClean="0"/>
+              <a:rPr lang="en-US"/>
               <a:t>Fifth level</a:t>
             </a:r>
-            <a:endParaRPr lang="en-US"/>
           </a:p>
         </p:txBody>
       </p:sp>
@@ -1769,7 +2019,7 @@
           <a:p>
             <a:fld id="{5BCAD085-E8A6-8845-BD4E-CB4CCA059FC4}" type="datetimeFigureOut">
               <a:rPr lang="en-US" smtClean="0"/>
-              <a:t>1/27/13</a:t>
+              <a:t>8/30/2026</a:t>
             </a:fld>
             <a:endParaRPr lang="en-US"/>
           </a:p>
@@ -1863,10 +2113,9 @@
           <a:lstStyle/>
           <a:p>
             <a:r>
-              <a:rPr lang="en-US" smtClean="0"/>
+              <a:rPr lang="en-US"/>
               <a:t>Click to edit Master title style</a:t>
             </a:r>
-            <a:endParaRPr lang="en-US"/>
           </a:p>
         </p:txBody>
       </p:sp>
@@ -1887,7 +2136,7 @@
           <a:p>
             <a:fld id="{5BCAD085-E8A6-8845-BD4E-CB4CCA059FC4}" type="datetimeFigureOut">
               <a:rPr lang="en-US" smtClean="0"/>
-              <a:t>1/27/13</a:t>
+              <a:t>8/30/2026</a:t>
             </a:fld>
             <a:endParaRPr lang="en-US"/>
           </a:p>
@@ -1982,7 +2231,7 @@
           <a:p>
             <a:fld id="{5BCAD085-E8A6-8845-BD4E-CB4CCA059FC4}" type="datetimeFigureOut">
               <a:rPr lang="en-US" smtClean="0"/>
-              <a:t>1/27/13</a:t>
+              <a:t>8/30/2026</a:t>
             </a:fld>
             <a:endParaRPr lang="en-US"/>
           </a:p>
@@ -2085,10 +2334,9 @@
           </a:lstStyle>
           <a:p>
             <a:r>
-              <a:rPr lang="en-US" smtClean="0"/>
+              <a:rPr lang="en-US"/>
               <a:t>Click to edit Master title style</a:t>
             </a:r>
-            <a:endParaRPr lang="en-US"/>
           </a:p>
         </p:txBody>
       </p:sp>
@@ -2142,38 +2390,37 @@
           <a:p>
             <a:pPr lvl="0"/>
             <a:r>
-              <a:rPr lang="en-US" smtClean="0"/>
+              <a:rPr lang="en-US"/>
               <a:t>Click to edit Master text styles</a:t>
             </a:r>
           </a:p>
           <a:p>
             <a:pPr lvl="1"/>
             <a:r>
-              <a:rPr lang="en-US" smtClean="0"/>
+              <a:rPr lang="en-US"/>
               <a:t>Second level</a:t>
             </a:r>
           </a:p>
           <a:p>
             <a:pPr lvl="2"/>
             <a:r>
-              <a:rPr lang="en-US" smtClean="0"/>
+              <a:rPr lang="en-US"/>
               <a:t>Third level</a:t>
             </a:r>
           </a:p>
           <a:p>
             <a:pPr lvl="3"/>
             <a:r>
-              <a:rPr lang="en-US" smtClean="0"/>
+              <a:rPr lang="en-US"/>
               <a:t>Fourth level</a:t>
             </a:r>
           </a:p>
           <a:p>
             <a:pPr lvl="4"/>
             <a:r>
-              <a:rPr lang="en-US" smtClean="0"/>
+              <a:rPr lang="en-US"/>
               <a:t>Fifth level</a:t>
             </a:r>
-            <a:endParaRPr lang="en-US"/>
           </a:p>
         </p:txBody>
       </p:sp>
@@ -2236,7 +2483,7 @@
           <a:p>
             <a:pPr lvl="0"/>
             <a:r>
-              <a:rPr lang="en-US" smtClean="0"/>
+              <a:rPr lang="en-US"/>
               <a:t>Click to edit Master text styles</a:t>
             </a:r>
           </a:p>
@@ -2259,7 +2506,7 @@
           <a:p>
             <a:fld id="{5BCAD085-E8A6-8845-BD4E-CB4CCA059FC4}" type="datetimeFigureOut">
               <a:rPr lang="en-US" smtClean="0"/>
-              <a:t>1/27/13</a:t>
+              <a:t>8/30/2026</a:t>
             </a:fld>
             <a:endParaRPr lang="en-US"/>
           </a:p>
@@ -2362,10 +2609,9 @@
           </a:lstStyle>
           <a:p>
             <a:r>
-              <a:rPr lang="en-US" smtClean="0"/>
+              <a:rPr lang="en-US"/>
               <a:t>Click to edit Master title style</a:t>
             </a:r>
-            <a:endParaRPr lang="en-US"/>
           </a:p>
         </p:txBody>
       </p:sp>
@@ -2489,7 +2735,7 @@
           <a:p>
             <a:pPr lvl="0"/>
             <a:r>
-              <a:rPr lang="en-US" smtClean="0"/>
+              <a:rPr lang="en-US"/>
               <a:t>Click to edit Master text styles</a:t>
             </a:r>
           </a:p>
@@ -2512,7 +2758,7 @@
           <a:p>
             <a:fld id="{5BCAD085-E8A6-8845-BD4E-CB4CCA059FC4}" type="datetimeFigureOut">
               <a:rPr lang="en-US" smtClean="0"/>
-              <a:t>1/27/13</a:t>
+              <a:t>8/30/2026</a:t>
             </a:fld>
             <a:endParaRPr lang="en-US"/>
           </a:p>
@@ -2621,10 +2867,9 @@
           <a:lstStyle/>
           <a:p>
             <a:r>
-              <a:rPr lang="en-US" smtClean="0"/>
+              <a:rPr lang="en-US"/>
               <a:t>Click to edit Master title style</a:t>
             </a:r>
-            <a:endParaRPr lang="en-US"/>
           </a:p>
         </p:txBody>
       </p:sp>
@@ -2655,38 +2900,37 @@
           <a:p>
             <a:pPr lvl="0"/>
             <a:r>
-              <a:rPr lang="en-US" smtClean="0"/>
+              <a:rPr lang="en-US"/>
               <a:t>Click to edit Master text styles</a:t>
             </a:r>
           </a:p>
           <a:p>
             <a:pPr lvl="1"/>
             <a:r>
-              <a:rPr lang="en-US" smtClean="0"/>
+              <a:rPr lang="en-US"/>
               <a:t>Second level</a:t>
             </a:r>
           </a:p>
           <a:p>
             <a:pPr lvl="2"/>
             <a:r>
-              <a:rPr lang="en-US" smtClean="0"/>
+              <a:rPr lang="en-US"/>
               <a:t>Third level</a:t>
             </a:r>
           </a:p>
           <a:p>
             <a:pPr lvl="3"/>
             <a:r>
-              <a:rPr lang="en-US" smtClean="0"/>
+              <a:rPr lang="en-US"/>
               <a:t>Fourth level</a:t>
             </a:r>
           </a:p>
           <a:p>
             <a:pPr lvl="4"/>
             <a:r>
-              <a:rPr lang="en-US" smtClean="0"/>
+              <a:rPr lang="en-US"/>
               <a:t>Fifth level</a:t>
             </a:r>
-            <a:endParaRPr lang="en-US"/>
           </a:p>
         </p:txBody>
       </p:sp>
@@ -2725,7 +2969,7 @@
           <a:p>
             <a:fld id="{5BCAD085-E8A6-8845-BD4E-CB4CCA059FC4}" type="datetimeFigureOut">
               <a:rPr lang="en-US" smtClean="0"/>
-              <a:t>1/27/13</a:t>
+              <a:t>8/30/2026</a:t>
             </a:fld>
             <a:endParaRPr lang="en-US"/>
           </a:p>
@@ -3084,7 +3328,7 @@
 </file>
 
 <file path=ppt/slides/slide1.xml><?xml version="1.0" encoding="utf-8"?>
-<p:sld xmlns:a="http://schemas.openxmlformats.org/drawingml/2006/main" xmlns:p="http://schemas.openxmlformats.org/presentationml/2006/main" xmlns:r="http://schemas.openxmlformats.org/officeDocument/2006/relationships">
+<p:sld xmlns:a="http://schemas.openxmlformats.org/drawingml/2006/main" xmlns:r="http://schemas.openxmlformats.org/officeDocument/2006/relationships" xmlns:p="http://schemas.openxmlformats.org/presentationml/2006/main">
   <p:cSld>
     <p:spTree>
       <p:nvGrpSpPr>
@@ -3092,7 +3336,607 @@
         <p:cNvGrpSpPr/>
         <p:nvPr/>
       </p:nvGrpSpPr>
-      <p:grpSpPr/>
+      <p:grpSpPr>
+        <a:xfrm>
+          <a:off x="0" y="0"/>
+          <a:ext cx="0" cy="0"/>
+          <a:chOff x="0" y="0"/>
+          <a:chExt cx="0" cy="0"/>
+        </a:xfrm>
+      </p:grpSpPr>
+      <p:sp>
+        <p:nvSpPr>
+          <p:cNvPr id="201" name="Shape 201"/>
+          <p:cNvSpPr/>
+          <p:nvPr/>
+        </p:nvSpPr>
+        <p:spPr>
+          <a:xfrm>
+            <a:off x="0" y="0"/>
+            <a:ext cx="9144000" cy="1219200"/>
+          </a:xfrm>
+          <a:prstGeom prst="rect">
+            <a:avLst/>
+          </a:prstGeom>
+          <a:solidFill>
+            <a:srgbClr val="14324B"/>
+          </a:solidFill>
+          <a:ln>
+            <a:noFill/>
+          </a:ln>
+        </p:spPr>
+        <p:txBody>
+          <a:bodyPr wrap="square" lIns="0" tIns="0" rIns="0" bIns="0" anchor="t">
+            <a:normAutofit/>
+          </a:bodyPr>
+          <a:lstStyle/>
+          <a:p>
+            <a:endParaRPr lang="en-US"/>
+          </a:p>
+        </p:txBody>
+      </p:sp>
+      <p:sp>
+        <p:nvSpPr>
+          <p:cNvPr id="202" name="Shape 202"/>
+          <p:cNvSpPr/>
+          <p:nvPr/>
+        </p:nvSpPr>
+        <p:spPr>
+          <a:xfrm>
+            <a:off x="0" y="1219200"/>
+            <a:ext cx="9144000" cy="63500"/>
+          </a:xfrm>
+          <a:prstGeom prst="rect">
+            <a:avLst/>
+          </a:prstGeom>
+          <a:solidFill>
+            <a:srgbClr val="C9772F"/>
+          </a:solidFill>
+          <a:ln>
+            <a:noFill/>
+          </a:ln>
+        </p:spPr>
+        <p:txBody>
+          <a:bodyPr wrap="square" lIns="0" tIns="0" rIns="0" bIns="0" anchor="t">
+            <a:normAutofit fontScale="25000" lnSpcReduction="20000"/>
+          </a:bodyPr>
+          <a:lstStyle/>
+          <a:p>
+            <a:endParaRPr lang="en-US"/>
+          </a:p>
+        </p:txBody>
+      </p:sp>
+      <p:sp>
+        <p:nvSpPr>
+          <p:cNvPr id="203" name="Shape 203"/>
+          <p:cNvSpPr/>
+          <p:nvPr/>
+        </p:nvSpPr>
+        <p:spPr>
+          <a:xfrm>
+            <a:off x="457200" y="6248400"/>
+            <a:ext cx="8229600" cy="12700"/>
+          </a:xfrm>
+          <a:prstGeom prst="rect">
+            <a:avLst/>
+          </a:prstGeom>
+          <a:solidFill>
+            <a:srgbClr val="DCE3EA"/>
+          </a:solidFill>
+          <a:ln>
+            <a:noFill/>
+          </a:ln>
+        </p:spPr>
+        <p:txBody>
+          <a:bodyPr wrap="square" lIns="0" tIns="0" rIns="0" bIns="0" anchor="t">
+            <a:normAutofit fontScale="25000" lnSpcReduction="20000"/>
+          </a:bodyPr>
+          <a:lstStyle/>
+          <a:p>
+            <a:endParaRPr lang="en-US"/>
+          </a:p>
+        </p:txBody>
+      </p:sp>
+      <p:sp>
+        <p:nvSpPr>
+          <p:cNvPr id="207" name="Shape 207"/>
+          <p:cNvSpPr/>
+          <p:nvPr/>
+        </p:nvSpPr>
+        <p:spPr>
+          <a:xfrm>
+            <a:off x="457200" y="1600200"/>
+            <a:ext cx="1943100" cy="1320800"/>
+          </a:xfrm>
+          <a:prstGeom prst="rect">
+            <a:avLst/>
+          </a:prstGeom>
+          <a:solidFill>
+            <a:srgbClr val="F8FAFC"/>
+          </a:solidFill>
+          <a:ln w="12700">
+            <a:solidFill>
+              <a:srgbClr val="DCE3EA"/>
+            </a:solidFill>
+          </a:ln>
+        </p:spPr>
+        <p:txBody>
+          <a:bodyPr wrap="square" lIns="203200" tIns="203200" rIns="127000" bIns="101600" anchor="t">
+            <a:normAutofit/>
+          </a:bodyPr>
+          <a:lstStyle/>
+          <a:p>
+            <a:pPr algn="l">
+              <a:spcAft>
+                <a:spcPts val="300"/>
+              </a:spcAft>
+              <a:buNone/>
+            </a:pPr>
+            <a:r>
+              <a:rPr lang="en-US" sz="3200" b="1" dirty="0">
+                <a:solidFill>
+                  <a:srgbClr val="14324B"/>
+                </a:solidFill>
+              </a:rPr>
+              <a:t>1,470</a:t>
+            </a:r>
+          </a:p>
+          <a:p>
+            <a:pPr algn="l">
+              <a:lnSpc>
+                <a:spcPct val="100000"/>
+              </a:lnSpc>
+              <a:buNone/>
+            </a:pPr>
+            <a:r>
+              <a:rPr lang="en-US" sz="1400" dirty="0">
+                <a:solidFill>
+                  <a:srgbClr val="6B7C8C"/>
+                </a:solidFill>
+              </a:rPr>
+              <a:t>Employees analyzed</a:t>
+            </a:r>
+          </a:p>
+        </p:txBody>
+      </p:sp>
+      <p:sp>
+        <p:nvSpPr>
+          <p:cNvPr id="208" name="Shape 208"/>
+          <p:cNvSpPr/>
+          <p:nvPr/>
+        </p:nvSpPr>
+        <p:spPr>
+          <a:xfrm>
+            <a:off x="457200" y="1600200"/>
+            <a:ext cx="50800" cy="1320800"/>
+          </a:xfrm>
+          <a:prstGeom prst="rect">
+            <a:avLst/>
+          </a:prstGeom>
+          <a:solidFill>
+            <a:srgbClr val="C9772F"/>
+          </a:solidFill>
+          <a:ln>
+            <a:noFill/>
+          </a:ln>
+        </p:spPr>
+        <p:txBody>
+          <a:bodyPr wrap="square" lIns="0" tIns="0" rIns="0" bIns="0" anchor="t">
+            <a:normAutofit/>
+          </a:bodyPr>
+          <a:lstStyle/>
+          <a:p>
+            <a:endParaRPr lang="en-US"/>
+          </a:p>
+        </p:txBody>
+      </p:sp>
+      <p:sp>
+        <p:nvSpPr>
+          <p:cNvPr id="209" name="Shape 209"/>
+          <p:cNvSpPr/>
+          <p:nvPr/>
+        </p:nvSpPr>
+        <p:spPr>
+          <a:xfrm>
+            <a:off x="2552700" y="1600200"/>
+            <a:ext cx="1943100" cy="1320800"/>
+          </a:xfrm>
+          <a:prstGeom prst="rect">
+            <a:avLst/>
+          </a:prstGeom>
+          <a:solidFill>
+            <a:srgbClr val="F8FAFC"/>
+          </a:solidFill>
+          <a:ln w="12700">
+            <a:solidFill>
+              <a:srgbClr val="DCE3EA"/>
+            </a:solidFill>
+          </a:ln>
+        </p:spPr>
+        <p:txBody>
+          <a:bodyPr wrap="square" lIns="203200" tIns="203200" rIns="127000" bIns="101600" anchor="t">
+            <a:normAutofit/>
+          </a:bodyPr>
+          <a:lstStyle/>
+          <a:p>
+            <a:pPr algn="l">
+              <a:spcAft>
+                <a:spcPts val="300"/>
+              </a:spcAft>
+              <a:buNone/>
+            </a:pPr>
+            <a:r>
+              <a:rPr lang="en-US" sz="3200" b="1" dirty="0">
+                <a:solidFill>
+                  <a:srgbClr val="14324B"/>
+                </a:solidFill>
+              </a:rPr>
+              <a:t>16.1%</a:t>
+            </a:r>
+          </a:p>
+          <a:p>
+            <a:pPr algn="l">
+              <a:lnSpc>
+                <a:spcPct val="100000"/>
+              </a:lnSpc>
+              <a:buNone/>
+            </a:pPr>
+            <a:r>
+              <a:rPr lang="en-US" sz="1400" dirty="0">
+                <a:solidFill>
+                  <a:srgbClr val="6B7C8C"/>
+                </a:solidFill>
+              </a:rPr>
+              <a:t>Historical attrition rate</a:t>
+            </a:r>
+          </a:p>
+        </p:txBody>
+      </p:sp>
+      <p:sp>
+        <p:nvSpPr>
+          <p:cNvPr id="210" name="Shape 210"/>
+          <p:cNvSpPr/>
+          <p:nvPr/>
+        </p:nvSpPr>
+        <p:spPr>
+          <a:xfrm>
+            <a:off x="2552700" y="1600200"/>
+            <a:ext cx="50800" cy="1320800"/>
+          </a:xfrm>
+          <a:prstGeom prst="rect">
+            <a:avLst/>
+          </a:prstGeom>
+          <a:solidFill>
+            <a:srgbClr val="C9772F"/>
+          </a:solidFill>
+          <a:ln>
+            <a:noFill/>
+          </a:ln>
+        </p:spPr>
+        <p:txBody>
+          <a:bodyPr wrap="square" lIns="0" tIns="0" rIns="0" bIns="0" anchor="t">
+            <a:normAutofit/>
+          </a:bodyPr>
+          <a:lstStyle/>
+          <a:p>
+            <a:endParaRPr lang="en-US"/>
+          </a:p>
+        </p:txBody>
+      </p:sp>
+      <p:sp>
+        <p:nvSpPr>
+          <p:cNvPr id="211" name="Shape 211"/>
+          <p:cNvSpPr/>
+          <p:nvPr/>
+        </p:nvSpPr>
+        <p:spPr>
+          <a:xfrm>
+            <a:off x="4648200" y="1600200"/>
+            <a:ext cx="1943100" cy="1320800"/>
+          </a:xfrm>
+          <a:prstGeom prst="rect">
+            <a:avLst/>
+          </a:prstGeom>
+          <a:solidFill>
+            <a:srgbClr val="F8FAFC"/>
+          </a:solidFill>
+          <a:ln w="12700">
+            <a:solidFill>
+              <a:srgbClr val="DCE3EA"/>
+            </a:solidFill>
+          </a:ln>
+        </p:spPr>
+        <p:txBody>
+          <a:bodyPr wrap="square" lIns="203200" tIns="203200" rIns="127000" bIns="101600" anchor="t">
+            <a:normAutofit/>
+          </a:bodyPr>
+          <a:lstStyle/>
+          <a:p>
+            <a:pPr algn="l">
+              <a:spcAft>
+                <a:spcPts val="300"/>
+              </a:spcAft>
+              <a:buNone/>
+            </a:pPr>
+            <a:r>
+              <a:rPr lang="en-US" sz="3200" b="1" dirty="0">
+                <a:solidFill>
+                  <a:srgbClr val="14324B"/>
+                </a:solidFill>
+              </a:rPr>
+              <a:t>1,233</a:t>
+            </a:r>
+          </a:p>
+          <a:p>
+            <a:pPr algn="l">
+              <a:lnSpc>
+                <a:spcPct val="100000"/>
+              </a:lnSpc>
+              <a:buNone/>
+            </a:pPr>
+            <a:r>
+              <a:rPr lang="en-US" sz="1400" dirty="0">
+                <a:solidFill>
+                  <a:srgbClr val="6B7C8C"/>
+                </a:solidFill>
+              </a:rPr>
+              <a:t>Active &amp; scored for risk</a:t>
+            </a:r>
+          </a:p>
+        </p:txBody>
+      </p:sp>
+      <p:sp>
+        <p:nvSpPr>
+          <p:cNvPr id="212" name="Shape 212"/>
+          <p:cNvSpPr/>
+          <p:nvPr/>
+        </p:nvSpPr>
+        <p:spPr>
+          <a:xfrm>
+            <a:off x="4648200" y="1600200"/>
+            <a:ext cx="50800" cy="1320800"/>
+          </a:xfrm>
+          <a:prstGeom prst="rect">
+            <a:avLst/>
+          </a:prstGeom>
+          <a:solidFill>
+            <a:srgbClr val="C9772F"/>
+          </a:solidFill>
+          <a:ln>
+            <a:noFill/>
+          </a:ln>
+        </p:spPr>
+        <p:txBody>
+          <a:bodyPr wrap="square" lIns="0" tIns="0" rIns="0" bIns="0" anchor="t">
+            <a:normAutofit/>
+          </a:bodyPr>
+          <a:lstStyle/>
+          <a:p>
+            <a:endParaRPr lang="en-US"/>
+          </a:p>
+        </p:txBody>
+      </p:sp>
+      <p:sp>
+        <p:nvSpPr>
+          <p:cNvPr id="213" name="Shape 213"/>
+          <p:cNvSpPr/>
+          <p:nvPr/>
+        </p:nvSpPr>
+        <p:spPr>
+          <a:xfrm>
+            <a:off x="6743700" y="1600200"/>
+            <a:ext cx="1943100" cy="1320800"/>
+          </a:xfrm>
+          <a:prstGeom prst="rect">
+            <a:avLst/>
+          </a:prstGeom>
+          <a:solidFill>
+            <a:srgbClr val="F8FAFC"/>
+          </a:solidFill>
+          <a:ln w="12700">
+            <a:solidFill>
+              <a:srgbClr val="DCE3EA"/>
+            </a:solidFill>
+          </a:ln>
+        </p:spPr>
+        <p:txBody>
+          <a:bodyPr wrap="square" lIns="203200" tIns="203200" rIns="127000" bIns="101600" anchor="t">
+            <a:normAutofit/>
+          </a:bodyPr>
+          <a:lstStyle/>
+          <a:p>
+            <a:pPr algn="l">
+              <a:spcAft>
+                <a:spcPts val="300"/>
+              </a:spcAft>
+              <a:buNone/>
+            </a:pPr>
+            <a:r>
+              <a:rPr lang="en-US" sz="3200" b="1" dirty="0">
+                <a:solidFill>
+                  <a:srgbClr val="14324B"/>
+                </a:solidFill>
+              </a:rPr>
+              <a:t>0.846</a:t>
+            </a:r>
+          </a:p>
+          <a:p>
+            <a:pPr algn="l">
+              <a:lnSpc>
+                <a:spcPct val="100000"/>
+              </a:lnSpc>
+              <a:buNone/>
+            </a:pPr>
+            <a:r>
+              <a:rPr lang="en-US" sz="1400" dirty="0">
+                <a:solidFill>
+                  <a:srgbClr val="6B7C8C"/>
+                </a:solidFill>
+              </a:rPr>
+              <a:t>Test concordance index</a:t>
+            </a:r>
+          </a:p>
+        </p:txBody>
+      </p:sp>
+      <p:sp>
+        <p:nvSpPr>
+          <p:cNvPr id="214" name="Shape 214"/>
+          <p:cNvSpPr/>
+          <p:nvPr/>
+        </p:nvSpPr>
+        <p:spPr>
+          <a:xfrm>
+            <a:off x="6743700" y="1600200"/>
+            <a:ext cx="50800" cy="1320800"/>
+          </a:xfrm>
+          <a:prstGeom prst="rect">
+            <a:avLst/>
+          </a:prstGeom>
+          <a:solidFill>
+            <a:srgbClr val="C9772F"/>
+          </a:solidFill>
+          <a:ln>
+            <a:noFill/>
+          </a:ln>
+        </p:spPr>
+        <p:txBody>
+          <a:bodyPr wrap="square" lIns="0" tIns="0" rIns="0" bIns="0" anchor="t">
+            <a:normAutofit/>
+          </a:bodyPr>
+          <a:lstStyle/>
+          <a:p>
+            <a:endParaRPr lang="en-US"/>
+          </a:p>
+        </p:txBody>
+      </p:sp>
+      <p:sp>
+        <p:nvSpPr>
+          <p:cNvPr id="215" name="Shape 215"/>
+          <p:cNvSpPr/>
+          <p:nvPr/>
+        </p:nvSpPr>
+        <p:spPr>
+          <a:xfrm>
+            <a:off x="457200" y="3454400"/>
+            <a:ext cx="4013200" cy="2413000"/>
+          </a:xfrm>
+          <a:prstGeom prst="rect">
+            <a:avLst/>
+          </a:prstGeom>
+          <a:solidFill>
+            <a:srgbClr val="F8FAFC"/>
+          </a:solidFill>
+          <a:ln w="12700">
+            <a:solidFill>
+              <a:srgbClr val="DCE3EA"/>
+            </a:solidFill>
+          </a:ln>
+        </p:spPr>
+        <p:txBody>
+          <a:bodyPr wrap="square" lIns="0" tIns="0" rIns="0" bIns="0" anchor="t">
+            <a:normAutofit/>
+          </a:bodyPr>
+          <a:lstStyle/>
+          <a:p>
+            <a:endParaRPr lang="en-US"/>
+          </a:p>
+        </p:txBody>
+      </p:sp>
+      <p:sp>
+        <p:nvSpPr>
+          <p:cNvPr id="216" name="Shape 216"/>
+          <p:cNvSpPr/>
+          <p:nvPr/>
+        </p:nvSpPr>
+        <p:spPr>
+          <a:xfrm>
+            <a:off x="457200" y="3454400"/>
+            <a:ext cx="50800" cy="2413000"/>
+          </a:xfrm>
+          <a:prstGeom prst="rect">
+            <a:avLst/>
+          </a:prstGeom>
+          <a:solidFill>
+            <a:srgbClr val="14324B"/>
+          </a:solidFill>
+          <a:ln>
+            <a:noFill/>
+          </a:ln>
+        </p:spPr>
+        <p:txBody>
+          <a:bodyPr wrap="square" lIns="0" tIns="0" rIns="0" bIns="0" anchor="t">
+            <a:normAutofit/>
+          </a:bodyPr>
+          <a:lstStyle/>
+          <a:p>
+            <a:endParaRPr lang="en-US"/>
+          </a:p>
+        </p:txBody>
+      </p:sp>
+      <p:sp>
+        <p:nvSpPr>
+          <p:cNvPr id="217" name="Shape 217"/>
+          <p:cNvSpPr/>
+          <p:nvPr/>
+        </p:nvSpPr>
+        <p:spPr>
+          <a:xfrm>
+            <a:off x="4673600" y="3454400"/>
+            <a:ext cx="4013200" cy="2413000"/>
+          </a:xfrm>
+          <a:prstGeom prst="rect">
+            <a:avLst/>
+          </a:prstGeom>
+          <a:solidFill>
+            <a:srgbClr val="F8FAFC"/>
+          </a:solidFill>
+          <a:ln w="12700">
+            <a:solidFill>
+              <a:srgbClr val="DCE3EA"/>
+            </a:solidFill>
+          </a:ln>
+        </p:spPr>
+        <p:txBody>
+          <a:bodyPr wrap="square" lIns="0" tIns="0" rIns="0" bIns="0" anchor="t">
+            <a:normAutofit/>
+          </a:bodyPr>
+          <a:lstStyle/>
+          <a:p>
+            <a:endParaRPr lang="en-US"/>
+          </a:p>
+        </p:txBody>
+      </p:sp>
+      <p:sp>
+        <p:nvSpPr>
+          <p:cNvPr id="218" name="Shape 218"/>
+          <p:cNvSpPr/>
+          <p:nvPr/>
+        </p:nvSpPr>
+        <p:spPr>
+          <a:xfrm>
+            <a:off x="4673600" y="3454400"/>
+            <a:ext cx="50800" cy="2413000"/>
+          </a:xfrm>
+          <a:prstGeom prst="rect">
+            <a:avLst/>
+          </a:prstGeom>
+          <a:solidFill>
+            <a:srgbClr val="C9772F"/>
+          </a:solidFill>
+          <a:ln>
+            <a:noFill/>
+          </a:ln>
+        </p:spPr>
+        <p:txBody>
+          <a:bodyPr wrap="square" lIns="0" tIns="0" rIns="0" bIns="0" anchor="t">
+            <a:normAutofit/>
+          </a:bodyPr>
+          <a:lstStyle/>
+          <a:p>
+            <a:endParaRPr lang="en-US"/>
+          </a:p>
+        </p:txBody>
+      </p:sp>
       <p:sp>
         <p:nvSpPr>
           <p:cNvPr id="2" name="TextBox 1"/>
@@ -3101,8 +3945,8 @@
         </p:nvSpPr>
         <p:spPr>
           <a:xfrm>
-            <a:off x="365760" y="274320"/>
-            <a:ext cx="8412480" cy="731520"/>
+            <a:off x="457200" y="584200"/>
+            <a:ext cx="7874000" cy="492443"/>
           </a:xfrm>
           <a:prstGeom prst="rect">
             <a:avLst/>
@@ -3110,15 +3954,20 @@
           <a:noFill/>
         </p:spPr>
         <p:txBody>
-          <a:bodyPr wrap="none">
+          <a:bodyPr wrap="square" lIns="0" tIns="0" rIns="0" bIns="0">
             <a:spAutoFit/>
           </a:bodyPr>
           <a:lstStyle/>
           <a:p>
-            <a:pPr>
-              <a:defRPr sz="2800" b="1"/>
-            </a:pPr>
-            <a:r>
+            <a:pPr algn="l">
+              <a:buNone/>
+            </a:pPr>
+            <a:r>
+              <a:rPr lang="en-US" sz="3200" b="1" dirty="0">
+                <a:solidFill>
+                  <a:srgbClr val="FFFFFF"/>
+                </a:solidFill>
+              </a:rPr>
               <a:t>Executive Summary</a:t>
             </a:r>
           </a:p>
@@ -3132,8 +3981,8 @@
         </p:nvSpPr>
         <p:spPr>
           <a:xfrm>
-            <a:off x="548640" y="1188720"/>
-            <a:ext cx="2743200" cy="5029200"/>
+            <a:off x="4953000" y="3708400"/>
+            <a:ext cx="3505200" cy="1877437"/>
           </a:xfrm>
           <a:prstGeom prst="rect">
             <a:avLst/>
@@ -3141,53 +3990,359 @@
           <a:noFill/>
         </p:spPr>
         <p:txBody>
-          <a:bodyPr wrap="square">
+          <a:bodyPr wrap="square" lIns="0" tIns="0" rIns="0" bIns="0">
             <a:spAutoFit/>
           </a:bodyPr>
           <a:lstStyle/>
           <a:p>
-            <a:pPr>
-              <a:defRPr sz="1400"/>
-            </a:pPr>
-            <a:r>
-              <a:t>- 1470 employees analyzed, 16.1% historical attrition rate.</a:t>
-            </a:r>
-          </a:p>
-          <a:p>
-            <a:pPr>
-              <a:defRPr sz="1400"/>
-            </a:pPr>
-            <a:r>
-              <a:t>- 1233 employees currently active and scored for resignation risk.</a:t>
-            </a:r>
-          </a:p>
-          <a:p>
-            <a:pPr>
-              <a:defRPr sz="1400"/>
-            </a:pPr>
-            <a:r>
-              <a:t>- Model validated at 0.846 concordance on held-out data (0.5 = random, 1.0 = perfect ranking).</a:t>
-            </a:r>
-          </a:p>
-          <a:p>
-            <a:pPr>
-              <a:defRPr sz="1400"/>
-            </a:pPr>
-            <a:r>
-              <a:t>- Strongest driver: Over Time (Yes) (hazard x2.20).</a:t>
-            </a:r>
-          </a:p>
-          <a:p>
-            <a:pPr>
-              <a:defRPr sz="1400"/>
-            </a:pPr>
-            <a:r>
-              <a:t>- Top at-risk employee: ID 2021, 25% predicted chance of leaving within a year.</a:t>
+            <a:pPr marL="152400" indent="-152400" algn="l">
+              <a:lnSpc>
+                <a:spcPct val="100000"/>
+              </a:lnSpc>
+              <a:spcAft>
+                <a:spcPts val="600"/>
+              </a:spcAft>
+              <a:buClr>
+                <a:srgbClr val="C9772F"/>
+              </a:buClr>
+              <a:buFont typeface="Arial"/>
+              <a:buChar char="▪"/>
+            </a:pPr>
+            <a:r>
+              <a:rPr lang="en-US" sz="1600" dirty="0">
+                <a:solidFill>
+                  <a:srgbClr val="2C3945"/>
+                </a:solidFill>
+              </a:rPr>
+              <a:t>Strongest driver: Over Time — hazard ×2.20.</a:t>
+            </a:r>
+          </a:p>
+          <a:p>
+            <a:pPr marL="152400" indent="-152400" algn="l">
+              <a:lnSpc>
+                <a:spcPct val="100000"/>
+              </a:lnSpc>
+              <a:spcAft>
+                <a:spcPts val="600"/>
+              </a:spcAft>
+              <a:buClr>
+                <a:srgbClr val="C9772F"/>
+              </a:buClr>
+              <a:buFont typeface="Arial"/>
+              <a:buChar char="▪"/>
+            </a:pPr>
+            <a:r>
+              <a:rPr lang="en-US" sz="1600" dirty="0">
+                <a:solidFill>
+                  <a:srgbClr val="2C3945"/>
+                </a:solidFill>
+              </a:rPr>
+              <a:t>Top at-risk employee: ID 2021 — 25% predicted chance of leaving within a year.</a:t>
+            </a:r>
+          </a:p>
+          <a:p>
+            <a:pPr marL="152400" indent="-152400" algn="l">
+              <a:lnSpc>
+                <a:spcPct val="100000"/>
+              </a:lnSpc>
+              <a:spcAft>
+                <a:spcPts val="600"/>
+              </a:spcAft>
+              <a:buClr>
+                <a:srgbClr val="C9772F"/>
+              </a:buClr>
+              <a:buFont typeface="Arial"/>
+              <a:buChar char="▪"/>
+            </a:pPr>
+            <a:r>
+              <a:rPr lang="en-US" sz="1600" dirty="0">
+                <a:solidFill>
+                  <a:srgbClr val="2C3945"/>
+                </a:solidFill>
+              </a:rPr>
+              <a:t>Top 15 at-risk employees identified for immediate action.</a:t>
+            </a:r>
+          </a:p>
+        </p:txBody>
+      </p:sp>
+      <p:sp>
+        <p:nvSpPr>
+          <p:cNvPr id="204" name="Text 204"/>
+          <p:cNvSpPr txBox="1"/>
+          <p:nvPr/>
+        </p:nvSpPr>
+        <p:spPr>
+          <a:xfrm>
+            <a:off x="457200" y="279400"/>
+            <a:ext cx="7874000" cy="254000"/>
+          </a:xfrm>
+          <a:prstGeom prst="rect">
+            <a:avLst/>
+          </a:prstGeom>
+          <a:noFill/>
+        </p:spPr>
+        <p:txBody>
+          <a:bodyPr wrap="square" lIns="0" tIns="0" rIns="0" bIns="0">
+            <a:normAutofit/>
+          </a:bodyPr>
+          <a:lstStyle/>
+          <a:p>
+            <a:pPr algn="l">
+              <a:buNone/>
+            </a:pPr>
+            <a:r>
+              <a:rPr lang="en-US" sz="1400" b="1" spc="300" dirty="0">
+                <a:solidFill>
+                  <a:srgbClr val="9FB6C9"/>
+                </a:solidFill>
+              </a:rPr>
+              <a:t>EXECUTIVE REPORT   |   SURVIVAL ANALYSIS</a:t>
+            </a:r>
+          </a:p>
+        </p:txBody>
+      </p:sp>
+      <p:sp>
+        <p:nvSpPr>
+          <p:cNvPr id="205" name="Text 205"/>
+          <p:cNvSpPr txBox="1"/>
+          <p:nvPr/>
+        </p:nvSpPr>
+        <p:spPr>
+          <a:xfrm>
+            <a:off x="457200" y="6350000"/>
+            <a:ext cx="6096000" cy="254000"/>
+          </a:xfrm>
+          <a:prstGeom prst="rect">
+            <a:avLst/>
+          </a:prstGeom>
+          <a:noFill/>
+        </p:spPr>
+        <p:txBody>
+          <a:bodyPr wrap="square" lIns="0" tIns="0" rIns="0" bIns="0">
+            <a:normAutofit/>
+          </a:bodyPr>
+          <a:lstStyle/>
+          <a:p>
+            <a:pPr algn="l">
+              <a:buNone/>
+            </a:pPr>
+            <a:r>
+              <a:rPr lang="en-US" sz="1400" dirty="0">
+                <a:solidFill>
+                  <a:srgbClr val="8A98A5"/>
+                </a:solidFill>
+              </a:rPr>
+              <a:t>Cox Proportional Hazards Model  |  Employee Attrition Analysis</a:t>
+            </a:r>
+          </a:p>
+        </p:txBody>
+      </p:sp>
+      <p:sp>
+        <p:nvSpPr>
+          <p:cNvPr id="206" name="Text 206"/>
+          <p:cNvSpPr txBox="1"/>
+          <p:nvPr/>
+        </p:nvSpPr>
+        <p:spPr>
+          <a:xfrm>
+            <a:off x="7670800" y="6350000"/>
+            <a:ext cx="1016000" cy="254000"/>
+          </a:xfrm>
+          <a:prstGeom prst="rect">
+            <a:avLst/>
+          </a:prstGeom>
+          <a:noFill/>
+        </p:spPr>
+        <p:txBody>
+          <a:bodyPr wrap="square" lIns="0" tIns="0" rIns="0" bIns="0">
+            <a:normAutofit/>
+          </a:bodyPr>
+          <a:lstStyle/>
+          <a:p>
+            <a:pPr algn="r">
+              <a:buNone/>
+            </a:pPr>
+            <a:r>
+              <a:rPr lang="en-US" sz="1400" b="1" dirty="0">
+                <a:solidFill>
+                  <a:srgbClr val="14324B"/>
+                </a:solidFill>
+              </a:rPr>
+              <a:t>01</a:t>
+            </a:r>
+          </a:p>
+        </p:txBody>
+      </p:sp>
+      <p:sp>
+        <p:nvSpPr>
+          <p:cNvPr id="219" name="Text 219"/>
+          <p:cNvSpPr txBox="1"/>
+          <p:nvPr/>
+        </p:nvSpPr>
+        <p:spPr>
+          <a:xfrm>
+            <a:off x="457200" y="3149600"/>
+            <a:ext cx="3810000" cy="254000"/>
+          </a:xfrm>
+          <a:prstGeom prst="rect">
+            <a:avLst/>
+          </a:prstGeom>
+          <a:noFill/>
+        </p:spPr>
+        <p:txBody>
+          <a:bodyPr wrap="square" lIns="0" tIns="0" rIns="0" bIns="0">
+            <a:normAutofit/>
+          </a:bodyPr>
+          <a:lstStyle/>
+          <a:p>
+            <a:pPr algn="l">
+              <a:buNone/>
+            </a:pPr>
+            <a:r>
+              <a:rPr lang="en-US" sz="1400" b="1" spc="240" dirty="0">
+                <a:solidFill>
+                  <a:srgbClr val="6B7C8C"/>
+                </a:solidFill>
+              </a:rPr>
+              <a:t>MODEL VALIDATION</a:t>
+            </a:r>
+          </a:p>
+        </p:txBody>
+      </p:sp>
+      <p:sp>
+        <p:nvSpPr>
+          <p:cNvPr id="220" name="Text 220"/>
+          <p:cNvSpPr txBox="1"/>
+          <p:nvPr/>
+        </p:nvSpPr>
+        <p:spPr>
+          <a:xfrm>
+            <a:off x="4673600" y="3149600"/>
+            <a:ext cx="3810000" cy="254000"/>
+          </a:xfrm>
+          <a:prstGeom prst="rect">
+            <a:avLst/>
+          </a:prstGeom>
+          <a:noFill/>
+        </p:spPr>
+        <p:txBody>
+          <a:bodyPr wrap="square" lIns="0" tIns="0" rIns="0" bIns="0">
+            <a:normAutofit/>
+          </a:bodyPr>
+          <a:lstStyle/>
+          <a:p>
+            <a:pPr algn="l">
+              <a:buNone/>
+            </a:pPr>
+            <a:r>
+              <a:rPr lang="en-US" sz="1400" b="1" spc="240" dirty="0">
+                <a:solidFill>
+                  <a:srgbClr val="6B7C8C"/>
+                </a:solidFill>
+              </a:rPr>
+              <a:t>HEADLINE FINDINGS</a:t>
+            </a:r>
+          </a:p>
+        </p:txBody>
+      </p:sp>
+      <p:sp>
+        <p:nvSpPr>
+          <p:cNvPr id="221" name="Text 221"/>
+          <p:cNvSpPr txBox="1"/>
+          <p:nvPr/>
+        </p:nvSpPr>
+        <p:spPr>
+          <a:xfrm>
+            <a:off x="736600" y="3708400"/>
+            <a:ext cx="3505200" cy="1981200"/>
+          </a:xfrm>
+          <a:prstGeom prst="rect">
+            <a:avLst/>
+          </a:prstGeom>
+          <a:noFill/>
+        </p:spPr>
+        <p:txBody>
+          <a:bodyPr wrap="square" lIns="0" tIns="0" rIns="0" bIns="0">
+            <a:normAutofit/>
+          </a:bodyPr>
+          <a:lstStyle/>
+          <a:p>
+            <a:pPr marL="152400" indent="-152400" algn="l">
+              <a:lnSpc>
+                <a:spcPct val="100000"/>
+              </a:lnSpc>
+              <a:spcAft>
+                <a:spcPts val="600"/>
+              </a:spcAft>
+              <a:buClr>
+                <a:srgbClr val="14324B"/>
+              </a:buClr>
+              <a:buFont typeface="Arial"/>
+              <a:buChar char="▪"/>
+            </a:pPr>
+            <a:r>
+              <a:rPr lang="en-US" sz="1600" dirty="0">
+                <a:solidFill>
+                  <a:srgbClr val="2C3945"/>
+                </a:solidFill>
+              </a:rPr>
+              <a:t>Concordance 0.849 train / 0.846 test — strong ranking power.</a:t>
+            </a:r>
+          </a:p>
+          <a:p>
+            <a:pPr marL="152400" indent="-152400" algn="l">
+              <a:lnSpc>
+                <a:spcPct val="100000"/>
+              </a:lnSpc>
+              <a:spcAft>
+                <a:spcPts val="600"/>
+              </a:spcAft>
+              <a:buClr>
+                <a:srgbClr val="14324B"/>
+              </a:buClr>
+              <a:buFont typeface="Arial"/>
+              <a:buChar char="▪"/>
+            </a:pPr>
+            <a:r>
+              <a:rPr lang="en-US" sz="1600" dirty="0">
+                <a:solidFill>
+                  <a:srgbClr val="2C3945"/>
+                </a:solidFill>
+              </a:rPr>
+              <a:t>Final model refit on all 1,470 employees after validation.</a:t>
+            </a:r>
+          </a:p>
+          <a:p>
+            <a:pPr marL="152400" indent="-152400" algn="l">
+              <a:lnSpc>
+                <a:spcPct val="100000"/>
+              </a:lnSpc>
+              <a:spcAft>
+                <a:spcPts val="600"/>
+              </a:spcAft>
+              <a:buClr>
+                <a:srgbClr val="14324B"/>
+              </a:buClr>
+              <a:buFont typeface="Arial"/>
+              <a:buChar char="▪"/>
+            </a:pPr>
+            <a:r>
+              <a:rPr lang="en-US" sz="1600" dirty="0">
+                <a:solidFill>
+                  <a:srgbClr val="2C3945"/>
+                </a:solidFill>
+              </a:rPr>
+              <a:t>Proportional-hazards assumption checked per covariate (notebook STEP 05).</a:t>
             </a:r>
           </a:p>
         </p:txBody>
       </p:sp>
     </p:spTree>
+    <p:extLst>
+      <p:ext uri="{BB962C8B-B14F-4D97-AF65-F5344CB8AC3E}">
+        <p14:creationId xmlns:p14="http://schemas.microsoft.com/office/powerpoint/2010/main" val="1568335212"/>
+      </p:ext>
+    </p:extLst>
   </p:cSld>
   <p:clrMapOvr>
     <a:masterClrMapping/>
@@ -3196,7 +4351,7 @@
 </file>
 
 <file path=ppt/slides/slide2.xml><?xml version="1.0" encoding="utf-8"?>
-<p:sld xmlns:a="http://schemas.openxmlformats.org/drawingml/2006/main" xmlns:p="http://schemas.openxmlformats.org/presentationml/2006/main" xmlns:r="http://schemas.openxmlformats.org/officeDocument/2006/relationships">
+<p:sld xmlns:a="http://schemas.openxmlformats.org/drawingml/2006/main" xmlns:r="http://schemas.openxmlformats.org/officeDocument/2006/relationships" xmlns:p="http://schemas.openxmlformats.org/presentationml/2006/main">
   <p:cSld>
     <p:spTree>
       <p:nvGrpSpPr>
@@ -3204,7 +4359,161 @@
         <p:cNvGrpSpPr/>
         <p:nvPr/>
       </p:nvGrpSpPr>
-      <p:grpSpPr/>
+      <p:grpSpPr>
+        <a:xfrm>
+          <a:off x="0" y="0"/>
+          <a:ext cx="0" cy="0"/>
+          <a:chOff x="0" y="0"/>
+          <a:chExt cx="0" cy="0"/>
+        </a:xfrm>
+      </p:grpSpPr>
+      <p:sp>
+        <p:nvSpPr>
+          <p:cNvPr id="301" name="Shape 301"/>
+          <p:cNvSpPr/>
+          <p:nvPr/>
+        </p:nvSpPr>
+        <p:spPr>
+          <a:xfrm>
+            <a:off x="0" y="0"/>
+            <a:ext cx="9144000" cy="1219200"/>
+          </a:xfrm>
+          <a:prstGeom prst="rect">
+            <a:avLst/>
+          </a:prstGeom>
+          <a:solidFill>
+            <a:srgbClr val="14324B"/>
+          </a:solidFill>
+          <a:ln>
+            <a:noFill/>
+          </a:ln>
+        </p:spPr>
+        <p:txBody>
+          <a:bodyPr wrap="square" lIns="0" tIns="0" rIns="0" bIns="0"/>
+          <a:lstStyle/>
+          <a:p>
+            <a:endParaRPr lang="en-US"/>
+          </a:p>
+        </p:txBody>
+      </p:sp>
+      <p:sp>
+        <p:nvSpPr>
+          <p:cNvPr id="302" name="Shape 302"/>
+          <p:cNvSpPr/>
+          <p:nvPr/>
+        </p:nvSpPr>
+        <p:spPr>
+          <a:xfrm>
+            <a:off x="0" y="1219200"/>
+            <a:ext cx="9144000" cy="63500"/>
+          </a:xfrm>
+          <a:prstGeom prst="rect">
+            <a:avLst/>
+          </a:prstGeom>
+          <a:solidFill>
+            <a:srgbClr val="C9772F"/>
+          </a:solidFill>
+          <a:ln>
+            <a:noFill/>
+          </a:ln>
+        </p:spPr>
+        <p:txBody>
+          <a:bodyPr wrap="square" lIns="0" tIns="0" rIns="0" bIns="0"/>
+          <a:lstStyle/>
+          <a:p>
+            <a:endParaRPr lang="en-US"/>
+          </a:p>
+        </p:txBody>
+      </p:sp>
+      <p:sp>
+        <p:nvSpPr>
+          <p:cNvPr id="303" name="Shape 303"/>
+          <p:cNvSpPr/>
+          <p:nvPr/>
+        </p:nvSpPr>
+        <p:spPr>
+          <a:xfrm>
+            <a:off x="457200" y="6248400"/>
+            <a:ext cx="8229600" cy="12700"/>
+          </a:xfrm>
+          <a:prstGeom prst="rect">
+            <a:avLst/>
+          </a:prstGeom>
+          <a:solidFill>
+            <a:srgbClr val="DCE3EA"/>
+          </a:solidFill>
+          <a:ln>
+            <a:noFill/>
+          </a:ln>
+        </p:spPr>
+        <p:txBody>
+          <a:bodyPr wrap="square" lIns="0" tIns="0" rIns="0" bIns="0"/>
+          <a:lstStyle/>
+          <a:p>
+            <a:endParaRPr lang="en-US"/>
+          </a:p>
+        </p:txBody>
+      </p:sp>
+      <p:sp>
+        <p:nvSpPr>
+          <p:cNvPr id="309" name="Shape 309"/>
+          <p:cNvSpPr/>
+          <p:nvPr/>
+        </p:nvSpPr>
+        <p:spPr>
+          <a:xfrm>
+            <a:off x="5740400" y="1752600"/>
+            <a:ext cx="2946400" cy="3771900"/>
+          </a:xfrm>
+          <a:prstGeom prst="rect">
+            <a:avLst/>
+          </a:prstGeom>
+          <a:solidFill>
+            <a:srgbClr val="F8FAFC"/>
+          </a:solidFill>
+          <a:ln w="12700">
+            <a:solidFill>
+              <a:srgbClr val="DCE3EA"/>
+            </a:solidFill>
+          </a:ln>
+        </p:spPr>
+        <p:txBody>
+          <a:bodyPr wrap="square" lIns="0" tIns="0" rIns="0" bIns="0"/>
+          <a:lstStyle/>
+          <a:p>
+            <a:endParaRPr lang="en-US"/>
+          </a:p>
+        </p:txBody>
+      </p:sp>
+      <p:sp>
+        <p:nvSpPr>
+          <p:cNvPr id="310" name="Shape 310"/>
+          <p:cNvSpPr/>
+          <p:nvPr/>
+        </p:nvSpPr>
+        <p:spPr>
+          <a:xfrm>
+            <a:off x="5740400" y="1752600"/>
+            <a:ext cx="50800" cy="3771900"/>
+          </a:xfrm>
+          <a:prstGeom prst="rect">
+            <a:avLst/>
+          </a:prstGeom>
+          <a:solidFill>
+            <a:srgbClr val="14324B"/>
+          </a:solidFill>
+          <a:ln>
+            <a:noFill/>
+          </a:ln>
+        </p:spPr>
+        <p:txBody>
+          <a:bodyPr wrap="square" lIns="0" tIns="0" rIns="0" bIns="0"/>
+          <a:lstStyle/>
+          <a:p>
+            <a:endParaRPr lang="en-US"/>
+          </a:p>
+        </p:txBody>
+      </p:sp>
       <p:sp>
         <p:nvSpPr>
           <p:cNvPr id="2" name="TextBox 1"/>
@@ -3213,8 +4522,8 @@
         </p:nvSpPr>
         <p:spPr>
           <a:xfrm>
-            <a:off x="365760" y="274320"/>
-            <a:ext cx="8412480" cy="731520"/>
+            <a:off x="457200" y="584200"/>
+            <a:ext cx="7874000" cy="492443"/>
           </a:xfrm>
           <a:prstGeom prst="rect">
             <a:avLst/>
@@ -3222,30 +4531,59 @@
           <a:noFill/>
         </p:spPr>
         <p:txBody>
-          <a:bodyPr wrap="none">
+          <a:bodyPr wrap="square" lIns="0" tIns="0" rIns="0" bIns="0">
             <a:spAutoFit/>
           </a:bodyPr>
           <a:lstStyle/>
           <a:p>
-            <a:pPr>
-              <a:defRPr sz="2800" b="1"/>
-            </a:pPr>
-            <a:r>
-              <a:t>Model Validation</a:t>
-            </a:r>
-          </a:p>
-        </p:txBody>
-      </p:sp>
-      <p:sp>
-        <p:nvSpPr>
-          <p:cNvPr id="3" name="TextBox 2"/>
+            <a:pPr algn="l">
+              <a:buNone/>
+            </a:pPr>
+            <a:r>
+              <a:rPr lang="en-US" sz="3200" b="1" dirty="0">
+                <a:solidFill>
+                  <a:srgbClr val="FFFFFF"/>
+                </a:solidFill>
+              </a:rPr>
+              <a:t>What Drives Attrition</a:t>
+            </a:r>
+          </a:p>
+        </p:txBody>
+      </p:sp>
+      <p:pic>
+        <p:nvPicPr>
+          <p:cNvPr id="3" name="Picture 2" descr="cox_hazard_ratios.png"/>
+          <p:cNvPicPr>
+            <a:picLocks noChangeAspect="1"/>
+          </p:cNvPicPr>
+          <p:nvPr/>
+        </p:nvPicPr>
+        <p:blipFill>
+          <a:blip r:embed="rId2"/>
+          <a:stretch>
+            <a:fillRect/>
+          </a:stretch>
+        </p:blipFill>
+        <p:spPr>
+          <a:xfrm>
+            <a:off x="457200" y="1752600"/>
+            <a:ext cx="5029200" cy="3771900"/>
+          </a:xfrm>
+          <a:prstGeom prst="rect">
+            <a:avLst/>
+          </a:prstGeom>
+        </p:spPr>
+      </p:pic>
+      <p:sp>
+        <p:nvSpPr>
+          <p:cNvPr id="4" name="TextBox 3"/>
           <p:cNvSpPr txBox="1"/>
           <p:nvPr/>
         </p:nvSpPr>
         <p:spPr>
           <a:xfrm>
-            <a:off x="548640" y="1188720"/>
-            <a:ext cx="2743200" cy="5029200"/>
+            <a:off x="5994400" y="1930400"/>
+            <a:ext cx="2489200" cy="2905924"/>
           </a:xfrm>
           <a:prstGeom prst="rect">
             <a:avLst/>
@@ -3253,45 +4591,447 @@
           <a:noFill/>
         </p:spPr>
         <p:txBody>
-          <a:bodyPr wrap="square">
+          <a:bodyPr wrap="square" lIns="0" tIns="0" rIns="0" bIns="0">
             <a:spAutoFit/>
           </a:bodyPr>
           <a:lstStyle/>
           <a:p>
-            <a:pPr>
-              <a:defRPr sz="1400"/>
-            </a:pPr>
-            <a:r>
-              <a:t>- Train concordance index: 0.849</a:t>
-            </a:r>
-          </a:p>
-          <a:p>
-            <a:pPr>
-              <a:defRPr sz="1400"/>
-            </a:pPr>
-            <a:r>
-              <a:t>- Test concordance index: 0.846</a:t>
-            </a:r>
-          </a:p>
-          <a:p>
-            <a:pPr>
-              <a:defRPr sz="1400"/>
-            </a:pPr>
-            <a:r>
-              <a:t>- Final model refit on all 1470 employees after validation.</a:t>
-            </a:r>
-          </a:p>
-          <a:p>
-            <a:pPr>
-              <a:defRPr sz="1400"/>
-            </a:pPr>
-            <a:r>
-              <a:t>- Proportional hazards assumption checked per covariate (see notebook STEP 05 for details).</a:t>
+            <a:pPr algn="l">
+              <a:lnSpc>
+                <a:spcPct val="100000"/>
+              </a:lnSpc>
+              <a:buNone/>
+            </a:pPr>
+            <a:r>
+              <a:rPr lang="en-US" sz="1400" b="1" dirty="0">
+                <a:solidFill>
+                  <a:srgbClr val="14324B"/>
+                </a:solidFill>
+              </a:rPr>
+              <a:t>Over Time (Yes)</a:t>
+            </a:r>
+          </a:p>
+          <a:p>
+            <a:pPr algn="l">
+              <a:lnSpc>
+                <a:spcPct val="100000"/>
+              </a:lnSpc>
+              <a:spcAft>
+                <a:spcPts val="500"/>
+              </a:spcAft>
+              <a:buNone/>
+            </a:pPr>
+            <a:r>
+              <a:rPr lang="en-US" sz="1400" dirty="0">
+                <a:solidFill>
+                  <a:srgbClr val="B0413E"/>
+                </a:solidFill>
+              </a:rPr>
+              <a:t>×2.20 hazard  ·  p = 0.000</a:t>
+            </a:r>
+          </a:p>
+          <a:p>
+            <a:pPr algn="l">
+              <a:lnSpc>
+                <a:spcPct val="100000"/>
+              </a:lnSpc>
+              <a:buNone/>
+            </a:pPr>
+            <a:r>
+              <a:rPr lang="en-US" sz="1400" b="1" dirty="0">
+                <a:solidFill>
+                  <a:srgbClr val="14324B"/>
+                </a:solidFill>
+              </a:rPr>
+              <a:t>Num Companies Worked</a:t>
+            </a:r>
+          </a:p>
+          <a:p>
+            <a:pPr algn="l">
+              <a:lnSpc>
+                <a:spcPct val="100000"/>
+              </a:lnSpc>
+              <a:spcAft>
+                <a:spcPts val="500"/>
+              </a:spcAft>
+              <a:buNone/>
+            </a:pPr>
+            <a:r>
+              <a:rPr lang="en-US" sz="1400" dirty="0">
+                <a:solidFill>
+                  <a:srgbClr val="B0413E"/>
+                </a:solidFill>
+              </a:rPr>
+              <a:t>×1.09 hazard  ·  p = 0.000</a:t>
+            </a:r>
+          </a:p>
+          <a:p>
+            <a:pPr algn="l">
+              <a:lnSpc>
+                <a:spcPct val="100000"/>
+              </a:lnSpc>
+              <a:buNone/>
+            </a:pPr>
+            <a:r>
+              <a:rPr lang="en-US" sz="1400" b="1" dirty="0">
+                <a:solidFill>
+                  <a:srgbClr val="14324B"/>
+                </a:solidFill>
+              </a:rPr>
+              <a:t>Monthly Income</a:t>
+            </a:r>
+          </a:p>
+          <a:p>
+            <a:pPr algn="l">
+              <a:lnSpc>
+                <a:spcPct val="100000"/>
+              </a:lnSpc>
+              <a:spcAft>
+                <a:spcPts val="500"/>
+              </a:spcAft>
+              <a:buNone/>
+            </a:pPr>
+            <a:r>
+              <a:rPr lang="en-US" sz="1400" dirty="0">
+                <a:solidFill>
+                  <a:srgbClr val="6B7C8C"/>
+                </a:solidFill>
+              </a:rPr>
+              <a:t>×1.00 hazard  ·  p = 0.000</a:t>
+            </a:r>
+          </a:p>
+          <a:p>
+            <a:pPr algn="l">
+              <a:lnSpc>
+                <a:spcPct val="100000"/>
+              </a:lnSpc>
+              <a:buNone/>
+            </a:pPr>
+            <a:r>
+              <a:rPr lang="en-US" sz="1400" b="1" dirty="0">
+                <a:solidFill>
+                  <a:srgbClr val="14324B"/>
+                </a:solidFill>
+              </a:rPr>
+              <a:t>Years Since Last Promotion</a:t>
+            </a:r>
+          </a:p>
+          <a:p>
+            <a:pPr algn="l">
+              <a:lnSpc>
+                <a:spcPct val="100000"/>
+              </a:lnSpc>
+              <a:spcAft>
+                <a:spcPts val="500"/>
+              </a:spcAft>
+              <a:buNone/>
+            </a:pPr>
+            <a:r>
+              <a:rPr lang="en-US" sz="1400" dirty="0">
+                <a:solidFill>
+                  <a:srgbClr val="2E7D5B"/>
+                </a:solidFill>
+              </a:rPr>
+              <a:t>×0.95 hazard  ·  p = 0.001</a:t>
+            </a:r>
+          </a:p>
+          <a:p>
+            <a:pPr algn="l">
+              <a:lnSpc>
+                <a:spcPct val="100000"/>
+              </a:lnSpc>
+              <a:buNone/>
+            </a:pPr>
+            <a:r>
+              <a:rPr lang="en-US" sz="1400" b="1" dirty="0">
+                <a:solidFill>
+                  <a:srgbClr val="14324B"/>
+                </a:solidFill>
+              </a:rPr>
+              <a:t>Age</a:t>
+            </a:r>
+          </a:p>
+          <a:p>
+            <a:pPr algn="l">
+              <a:lnSpc>
+                <a:spcPct val="100000"/>
+              </a:lnSpc>
+              <a:spcAft>
+                <a:spcPts val="500"/>
+              </a:spcAft>
+              <a:buNone/>
+            </a:pPr>
+            <a:r>
+              <a:rPr lang="en-US" sz="1400" dirty="0">
+                <a:solidFill>
+                  <a:srgbClr val="2E7D5B"/>
+                </a:solidFill>
+              </a:rPr>
+              <a:t>×0.97 hazard  ·  p = 0.000</a:t>
+            </a:r>
+          </a:p>
+          <a:p>
+            <a:pPr algn="l">
+              <a:lnSpc>
+                <a:spcPct val="100000"/>
+              </a:lnSpc>
+              <a:buNone/>
+            </a:pPr>
+            <a:r>
+              <a:rPr lang="en-US" sz="1400" b="1" dirty="0">
+                <a:solidFill>
+                  <a:srgbClr val="14324B"/>
+                </a:solidFill>
+              </a:rPr>
+              <a:t>Job Level</a:t>
+            </a:r>
+          </a:p>
+          <a:p>
+            <a:pPr algn="l">
+              <a:lnSpc>
+                <a:spcPct val="100000"/>
+              </a:lnSpc>
+              <a:spcAft>
+                <a:spcPts val="500"/>
+              </a:spcAft>
+              <a:buNone/>
+            </a:pPr>
+            <a:r>
+              <a:rPr lang="en-US" sz="1400" dirty="0">
+                <a:solidFill>
+                  <a:srgbClr val="2E7D5B"/>
+                </a:solidFill>
+              </a:rPr>
+              <a:t>×0.75 hazard  ·  p = 0.000</a:t>
+            </a:r>
+          </a:p>
+        </p:txBody>
+      </p:sp>
+      <p:sp>
+        <p:nvSpPr>
+          <p:cNvPr id="304" name="Text 304"/>
+          <p:cNvSpPr txBox="1"/>
+          <p:nvPr/>
+        </p:nvSpPr>
+        <p:spPr>
+          <a:xfrm>
+            <a:off x="457200" y="279400"/>
+            <a:ext cx="7874000" cy="254000"/>
+          </a:xfrm>
+          <a:prstGeom prst="rect">
+            <a:avLst/>
+          </a:prstGeom>
+          <a:noFill/>
+        </p:spPr>
+        <p:txBody>
+          <a:bodyPr wrap="square" lIns="0" tIns="0" rIns="0" bIns="0">
+            <a:normAutofit/>
+          </a:bodyPr>
+          <a:lstStyle/>
+          <a:p>
+            <a:pPr algn="l">
+              <a:buNone/>
+            </a:pPr>
+            <a:r>
+              <a:rPr lang="en-US" sz="1400" b="1" spc="300" dirty="0">
+                <a:solidFill>
+                  <a:srgbClr val="9FB6C9"/>
+                </a:solidFill>
+              </a:rPr>
+              <a:t>EXECUTIVE REPORT   |   SURVIVAL ANALYSIS</a:t>
+            </a:r>
+          </a:p>
+        </p:txBody>
+      </p:sp>
+      <p:sp>
+        <p:nvSpPr>
+          <p:cNvPr id="305" name="Text 305"/>
+          <p:cNvSpPr txBox="1"/>
+          <p:nvPr/>
+        </p:nvSpPr>
+        <p:spPr>
+          <a:xfrm>
+            <a:off x="457200" y="6350000"/>
+            <a:ext cx="6096000" cy="254000"/>
+          </a:xfrm>
+          <a:prstGeom prst="rect">
+            <a:avLst/>
+          </a:prstGeom>
+          <a:noFill/>
+        </p:spPr>
+        <p:txBody>
+          <a:bodyPr wrap="square" lIns="0" tIns="0" rIns="0" bIns="0">
+            <a:normAutofit/>
+          </a:bodyPr>
+          <a:lstStyle/>
+          <a:p>
+            <a:pPr algn="l">
+              <a:buNone/>
+            </a:pPr>
+            <a:r>
+              <a:rPr lang="en-US" sz="1400" dirty="0">
+                <a:solidFill>
+                  <a:srgbClr val="8A98A5"/>
+                </a:solidFill>
+              </a:rPr>
+              <a:t>Cox Proportional Hazards Model  |  Employee Attrition Analysis</a:t>
+            </a:r>
+          </a:p>
+        </p:txBody>
+      </p:sp>
+      <p:sp>
+        <p:nvSpPr>
+          <p:cNvPr id="306" name="Text 306"/>
+          <p:cNvSpPr txBox="1"/>
+          <p:nvPr/>
+        </p:nvSpPr>
+        <p:spPr>
+          <a:xfrm>
+            <a:off x="7670800" y="6350000"/>
+            <a:ext cx="1016000" cy="254000"/>
+          </a:xfrm>
+          <a:prstGeom prst="rect">
+            <a:avLst/>
+          </a:prstGeom>
+          <a:noFill/>
+        </p:spPr>
+        <p:txBody>
+          <a:bodyPr wrap="square" lIns="0" tIns="0" rIns="0" bIns="0">
+            <a:normAutofit/>
+          </a:bodyPr>
+          <a:lstStyle/>
+          <a:p>
+            <a:pPr algn="r">
+              <a:buNone/>
+            </a:pPr>
+            <a:r>
+              <a:rPr lang="en-US" sz="1400" b="1" dirty="0">
+                <a:solidFill>
+                  <a:srgbClr val="14324B"/>
+                </a:solidFill>
+              </a:rPr>
+              <a:t>02</a:t>
+            </a:r>
+          </a:p>
+        </p:txBody>
+      </p:sp>
+      <p:sp>
+        <p:nvSpPr>
+          <p:cNvPr id="307" name="Text 307"/>
+          <p:cNvSpPr txBox="1"/>
+          <p:nvPr/>
+        </p:nvSpPr>
+        <p:spPr>
+          <a:xfrm>
+            <a:off x="457200" y="1447800"/>
+            <a:ext cx="3810000" cy="254000"/>
+          </a:xfrm>
+          <a:prstGeom prst="rect">
+            <a:avLst/>
+          </a:prstGeom>
+          <a:noFill/>
+        </p:spPr>
+        <p:txBody>
+          <a:bodyPr wrap="square" lIns="0" tIns="0" rIns="0" bIns="0">
+            <a:normAutofit/>
+          </a:bodyPr>
+          <a:lstStyle/>
+          <a:p>
+            <a:pPr algn="l">
+              <a:buNone/>
+            </a:pPr>
+            <a:r>
+              <a:rPr lang="en-US" sz="1400" b="1" spc="240" dirty="0">
+                <a:solidFill>
+                  <a:srgbClr val="6B7C8C"/>
+                </a:solidFill>
+              </a:rPr>
+              <a:t>COEFFICIENT PLOT</a:t>
+            </a:r>
+          </a:p>
+        </p:txBody>
+      </p:sp>
+      <p:sp>
+        <p:nvSpPr>
+          <p:cNvPr id="308" name="Text 308"/>
+          <p:cNvSpPr txBox="1"/>
+          <p:nvPr/>
+        </p:nvSpPr>
+        <p:spPr>
+          <a:xfrm>
+            <a:off x="5740400" y="1447800"/>
+            <a:ext cx="3048000" cy="254000"/>
+          </a:xfrm>
+          <a:prstGeom prst="rect">
+            <a:avLst/>
+          </a:prstGeom>
+          <a:noFill/>
+        </p:spPr>
+        <p:txBody>
+          <a:bodyPr wrap="square" lIns="0" tIns="0" rIns="0" bIns="0">
+            <a:normAutofit/>
+          </a:bodyPr>
+          <a:lstStyle/>
+          <a:p>
+            <a:pPr algn="l">
+              <a:buNone/>
+            </a:pPr>
+            <a:r>
+              <a:rPr lang="en-US" sz="1400" b="1" spc="240" dirty="0">
+                <a:solidFill>
+                  <a:srgbClr val="6B7C8C"/>
+                </a:solidFill>
+              </a:rPr>
+              <a:t>HAZARD RATIOS</a:t>
+            </a:r>
+          </a:p>
+        </p:txBody>
+      </p:sp>
+      <p:sp>
+        <p:nvSpPr>
+          <p:cNvPr id="311" name="Text 311"/>
+          <p:cNvSpPr txBox="1"/>
+          <p:nvPr/>
+        </p:nvSpPr>
+        <p:spPr>
+          <a:xfrm>
+            <a:off x="457200" y="5638800"/>
+            <a:ext cx="5029200" cy="508000"/>
+          </a:xfrm>
+          <a:prstGeom prst="rect">
+            <a:avLst/>
+          </a:prstGeom>
+          <a:noFill/>
+        </p:spPr>
+        <p:txBody>
+          <a:bodyPr wrap="square" lIns="0" tIns="0" rIns="0" bIns="0">
+            <a:normAutofit/>
+          </a:bodyPr>
+          <a:lstStyle/>
+          <a:p>
+            <a:pPr algn="l">
+              <a:lnSpc>
+                <a:spcPct val="100000"/>
+              </a:lnSpc>
+              <a:buNone/>
+            </a:pPr>
+            <a:r>
+              <a:rPr lang="en-US" sz="1400" i="1" dirty="0">
+                <a:solidFill>
+                  <a:srgbClr val="8A98A5"/>
+                </a:solidFill>
+              </a:rPr>
+              <a:t>Hazard ratio above 1.0 raises resignation risk; below 1.0 lowers it. All drivers significant at p &lt; 0.01.</a:t>
             </a:r>
           </a:p>
         </p:txBody>
       </p:sp>
     </p:spTree>
+    <p:extLst>
+      <p:ext uri="{BB962C8B-B14F-4D97-AF65-F5344CB8AC3E}">
+        <p14:creationId xmlns:p14="http://schemas.microsoft.com/office/powerpoint/2010/main" val="3097959283"/>
+      </p:ext>
+    </p:extLst>
   </p:cSld>
   <p:clrMapOvr>
     <a:masterClrMapping/>
@@ -3300,7 +5040,7 @@
 </file>
 
 <file path=ppt/slides/slide3.xml><?xml version="1.0" encoding="utf-8"?>
-<p:sld xmlns:a="http://schemas.openxmlformats.org/drawingml/2006/main" xmlns:p="http://schemas.openxmlformats.org/presentationml/2006/main" xmlns:r="http://schemas.openxmlformats.org/officeDocument/2006/relationships">
+<p:sld xmlns:a="http://schemas.openxmlformats.org/drawingml/2006/main" xmlns:r="http://schemas.openxmlformats.org/officeDocument/2006/relationships" xmlns:p="http://schemas.openxmlformats.org/presentationml/2006/main">
   <p:cSld>
     <p:spTree>
       <p:nvGrpSpPr>
@@ -3308,7 +5048,219 @@
         <p:cNvGrpSpPr/>
         <p:nvPr/>
       </p:nvGrpSpPr>
-      <p:grpSpPr/>
+      <p:grpSpPr>
+        <a:xfrm>
+          <a:off x="0" y="0"/>
+          <a:ext cx="0" cy="0"/>
+          <a:chOff x="0" y="0"/>
+          <a:chExt cx="0" cy="0"/>
+        </a:xfrm>
+      </p:grpSpPr>
+      <p:sp>
+        <p:nvSpPr>
+          <p:cNvPr id="401" name="Shape 401"/>
+          <p:cNvSpPr/>
+          <p:nvPr/>
+        </p:nvSpPr>
+        <p:spPr>
+          <a:xfrm>
+            <a:off x="0" y="0"/>
+            <a:ext cx="9144000" cy="1219200"/>
+          </a:xfrm>
+          <a:prstGeom prst="rect">
+            <a:avLst/>
+          </a:prstGeom>
+          <a:solidFill>
+            <a:srgbClr val="14324B"/>
+          </a:solidFill>
+          <a:ln>
+            <a:noFill/>
+          </a:ln>
+        </p:spPr>
+        <p:txBody>
+          <a:bodyPr wrap="square" lIns="0" tIns="0" rIns="0" bIns="0"/>
+          <a:lstStyle/>
+          <a:p>
+            <a:endParaRPr lang="en-US"/>
+          </a:p>
+        </p:txBody>
+      </p:sp>
+      <p:sp>
+        <p:nvSpPr>
+          <p:cNvPr id="402" name="Shape 402"/>
+          <p:cNvSpPr/>
+          <p:nvPr/>
+        </p:nvSpPr>
+        <p:spPr>
+          <a:xfrm>
+            <a:off x="0" y="1219200"/>
+            <a:ext cx="9144000" cy="63500"/>
+          </a:xfrm>
+          <a:prstGeom prst="rect">
+            <a:avLst/>
+          </a:prstGeom>
+          <a:solidFill>
+            <a:srgbClr val="C9772F"/>
+          </a:solidFill>
+          <a:ln>
+            <a:noFill/>
+          </a:ln>
+        </p:spPr>
+        <p:txBody>
+          <a:bodyPr wrap="square" lIns="0" tIns="0" rIns="0" bIns="0"/>
+          <a:lstStyle/>
+          <a:p>
+            <a:endParaRPr lang="en-US"/>
+          </a:p>
+        </p:txBody>
+      </p:sp>
+      <p:sp>
+        <p:nvSpPr>
+          <p:cNvPr id="403" name="Shape 403"/>
+          <p:cNvSpPr/>
+          <p:nvPr/>
+        </p:nvSpPr>
+        <p:spPr>
+          <a:xfrm>
+            <a:off x="457200" y="6248400"/>
+            <a:ext cx="8229600" cy="12700"/>
+          </a:xfrm>
+          <a:prstGeom prst="rect">
+            <a:avLst/>
+          </a:prstGeom>
+          <a:solidFill>
+            <a:srgbClr val="DCE3EA"/>
+          </a:solidFill>
+          <a:ln>
+            <a:noFill/>
+          </a:ln>
+        </p:spPr>
+        <p:txBody>
+          <a:bodyPr wrap="square" lIns="0" tIns="0" rIns="0" bIns="0"/>
+          <a:lstStyle/>
+          <a:p>
+            <a:endParaRPr lang="en-US"/>
+          </a:p>
+        </p:txBody>
+      </p:sp>
+      <p:sp>
+        <p:nvSpPr>
+          <p:cNvPr id="409" name="Shape 409"/>
+          <p:cNvSpPr/>
+          <p:nvPr/>
+        </p:nvSpPr>
+        <p:spPr>
+          <a:xfrm>
+            <a:off x="5740400" y="1752600"/>
+            <a:ext cx="2946400" cy="1676400"/>
+          </a:xfrm>
+          <a:prstGeom prst="rect">
+            <a:avLst/>
+          </a:prstGeom>
+          <a:solidFill>
+            <a:srgbClr val="F8FAFC"/>
+          </a:solidFill>
+          <a:ln w="12700">
+            <a:solidFill>
+              <a:srgbClr val="DCE3EA"/>
+            </a:solidFill>
+          </a:ln>
+        </p:spPr>
+        <p:txBody>
+          <a:bodyPr wrap="square" lIns="0" tIns="0" rIns="0" bIns="0"/>
+          <a:lstStyle/>
+          <a:p>
+            <a:endParaRPr lang="en-US"/>
+          </a:p>
+        </p:txBody>
+      </p:sp>
+      <p:sp>
+        <p:nvSpPr>
+          <p:cNvPr id="410" name="Shape 410"/>
+          <p:cNvSpPr/>
+          <p:nvPr/>
+        </p:nvSpPr>
+        <p:spPr>
+          <a:xfrm>
+            <a:off x="5740400" y="1752600"/>
+            <a:ext cx="50800" cy="1676400"/>
+          </a:xfrm>
+          <a:prstGeom prst="rect">
+            <a:avLst/>
+          </a:prstGeom>
+          <a:solidFill>
+            <a:srgbClr val="14324B"/>
+          </a:solidFill>
+          <a:ln>
+            <a:noFill/>
+          </a:ln>
+        </p:spPr>
+        <p:txBody>
+          <a:bodyPr wrap="square" lIns="0" tIns="0" rIns="0" bIns="0"/>
+          <a:lstStyle/>
+          <a:p>
+            <a:endParaRPr lang="en-US"/>
+          </a:p>
+        </p:txBody>
+      </p:sp>
+      <p:sp>
+        <p:nvSpPr>
+          <p:cNvPr id="412" name="Shape 412"/>
+          <p:cNvSpPr/>
+          <p:nvPr/>
+        </p:nvSpPr>
+        <p:spPr>
+          <a:xfrm>
+            <a:off x="5740400" y="3632200"/>
+            <a:ext cx="2946400" cy="1892300"/>
+          </a:xfrm>
+          <a:prstGeom prst="rect">
+            <a:avLst/>
+          </a:prstGeom>
+          <a:solidFill>
+            <a:srgbClr val="F1F5F9"/>
+          </a:solidFill>
+          <a:ln>
+            <a:noFill/>
+          </a:ln>
+        </p:spPr>
+        <p:txBody>
+          <a:bodyPr wrap="square" lIns="0" tIns="0" rIns="0" bIns="0"/>
+          <a:lstStyle/>
+          <a:p>
+            <a:endParaRPr lang="en-US"/>
+          </a:p>
+        </p:txBody>
+      </p:sp>
+      <p:sp>
+        <p:nvSpPr>
+          <p:cNvPr id="413" name="Shape 413"/>
+          <p:cNvSpPr/>
+          <p:nvPr/>
+        </p:nvSpPr>
+        <p:spPr>
+          <a:xfrm>
+            <a:off x="5740400" y="3632200"/>
+            <a:ext cx="50800" cy="1892300"/>
+          </a:xfrm>
+          <a:prstGeom prst="rect">
+            <a:avLst/>
+          </a:prstGeom>
+          <a:solidFill>
+            <a:srgbClr val="C9772F"/>
+          </a:solidFill>
+          <a:ln>
+            <a:noFill/>
+          </a:ln>
+        </p:spPr>
+        <p:txBody>
+          <a:bodyPr wrap="square" lIns="0" tIns="0" rIns="0" bIns="0"/>
+          <a:lstStyle/>
+          <a:p>
+            <a:endParaRPr lang="en-US"/>
+          </a:p>
+        </p:txBody>
+      </p:sp>
       <p:sp>
         <p:nvSpPr>
           <p:cNvPr id="2" name="TextBox 1"/>
@@ -3317,8 +5269,8 @@
         </p:nvSpPr>
         <p:spPr>
           <a:xfrm>
-            <a:off x="365760" y="274320"/>
-            <a:ext cx="8412480" cy="731520"/>
+            <a:off x="457200" y="584200"/>
+            <a:ext cx="7874000" cy="492443"/>
           </a:xfrm>
           <a:prstGeom prst="rect">
             <a:avLst/>
@@ -3326,23 +5278,28 @@
           <a:noFill/>
         </p:spPr>
         <p:txBody>
-          <a:bodyPr wrap="none">
+          <a:bodyPr wrap="square" lIns="0" tIns="0" rIns="0" bIns="0">
             <a:spAutoFit/>
           </a:bodyPr>
           <a:lstStyle/>
           <a:p>
-            <a:pPr>
-              <a:defRPr sz="2800" b="1"/>
-            </a:pPr>
-            <a:r>
-              <a:t>What Drives Attrition</a:t>
+            <a:pPr algn="l">
+              <a:buNone/>
+            </a:pPr>
+            <a:r>
+              <a:rPr lang="en-US" sz="3200" b="1" dirty="0">
+                <a:solidFill>
+                  <a:srgbClr val="FFFFFF"/>
+                </a:solidFill>
+              </a:rPr>
+              <a:t>Retention by Overtime Status</a:t>
             </a:r>
           </a:p>
         </p:txBody>
       </p:sp>
       <p:pic>
         <p:nvPicPr>
-          <p:cNvPr id="3" name="Picture 2" descr="cox_hazard_ratios.png"/>
+          <p:cNvPr id="3" name="Picture 2" descr="km_overtime.png"/>
           <p:cNvPicPr>
             <a:picLocks noChangeAspect="1"/>
           </p:cNvPicPr>
@@ -3356,8 +5313,8 @@
         </p:blipFill>
         <p:spPr>
           <a:xfrm>
-            <a:off x="365760" y="1188720"/>
-            <a:ext cx="5486400" cy="4114800"/>
+            <a:off x="457200" y="1752600"/>
+            <a:ext cx="5029200" cy="3771900"/>
           </a:xfrm>
           <a:prstGeom prst="rect">
             <a:avLst/>
@@ -3372,8 +5329,8 @@
         </p:nvSpPr>
         <p:spPr>
           <a:xfrm>
-            <a:off x="6035040" y="1188720"/>
-            <a:ext cx="2743200" cy="5029200"/>
+            <a:off x="5994400" y="4114800"/>
+            <a:ext cx="2489200" cy="738664"/>
           </a:xfrm>
           <a:prstGeom prst="rect">
             <a:avLst/>
@@ -3381,61 +5338,344 @@
           <a:noFill/>
         </p:spPr>
         <p:txBody>
-          <a:bodyPr wrap="square">
+          <a:bodyPr wrap="square" lIns="0" tIns="0" rIns="0" bIns="0">
             <a:spAutoFit/>
           </a:bodyPr>
           <a:lstStyle/>
           <a:p>
-            <a:pPr>
-              <a:defRPr sz="1400"/>
-            </a:pPr>
-            <a:r>
-              <a:t>- Over Time (Yes): hazard x2.20 (p=0.000)</a:t>
-            </a:r>
-          </a:p>
-          <a:p>
-            <a:pPr>
-              <a:defRPr sz="1400"/>
-            </a:pPr>
-            <a:r>
-              <a:t>- Age: hazard x0.97 (p=0.000)</a:t>
-            </a:r>
-          </a:p>
-          <a:p>
-            <a:pPr>
-              <a:defRPr sz="1400"/>
-            </a:pPr>
-            <a:r>
-              <a:t>- Job Level: hazard x0.75 (p=0.000)</a:t>
-            </a:r>
-          </a:p>
-          <a:p>
-            <a:pPr>
-              <a:defRPr sz="1400"/>
-            </a:pPr>
-            <a:r>
-              <a:t>- Num Companies Worked: hazard x1.09 (p=0.000)</a:t>
-            </a:r>
-          </a:p>
-          <a:p>
-            <a:pPr>
-              <a:defRPr sz="1400"/>
-            </a:pPr>
-            <a:r>
-              <a:t>- Monthly Income: hazard x1.00 (p=0.000)</a:t>
-            </a:r>
-          </a:p>
-          <a:p>
-            <a:pPr>
-              <a:defRPr sz="1400"/>
-            </a:pPr>
-            <a:r>
-              <a:t>- Years Since Last Promotion: hazard x0.95 (p=0.001)</a:t>
+            <a:pPr algn="l">
+              <a:lnSpc>
+                <a:spcPct val="100000"/>
+              </a:lnSpc>
+              <a:buNone/>
+            </a:pPr>
+            <a:r>
+              <a:rPr lang="en-US" sz="1600" dirty="0">
+                <a:solidFill>
+                  <a:srgbClr val="1F2933"/>
+                </a:solidFill>
+              </a:rPr>
+              <a:t>Overtime is the single most directly actionable factor found in the model.</a:t>
+            </a:r>
+          </a:p>
+        </p:txBody>
+      </p:sp>
+      <p:sp>
+        <p:nvSpPr>
+          <p:cNvPr id="404" name="Text 404"/>
+          <p:cNvSpPr txBox="1"/>
+          <p:nvPr/>
+        </p:nvSpPr>
+        <p:spPr>
+          <a:xfrm>
+            <a:off x="457200" y="279400"/>
+            <a:ext cx="7874000" cy="254000"/>
+          </a:xfrm>
+          <a:prstGeom prst="rect">
+            <a:avLst/>
+          </a:prstGeom>
+          <a:noFill/>
+        </p:spPr>
+        <p:txBody>
+          <a:bodyPr wrap="square" lIns="0" tIns="0" rIns="0" bIns="0">
+            <a:normAutofit/>
+          </a:bodyPr>
+          <a:lstStyle/>
+          <a:p>
+            <a:pPr algn="l">
+              <a:buNone/>
+            </a:pPr>
+            <a:r>
+              <a:rPr lang="en-US" sz="1400" b="1" spc="300" dirty="0">
+                <a:solidFill>
+                  <a:srgbClr val="9FB6C9"/>
+                </a:solidFill>
+              </a:rPr>
+              <a:t>EXECUTIVE REPORT   |   SURVIVAL ANALYSIS</a:t>
+            </a:r>
+          </a:p>
+        </p:txBody>
+      </p:sp>
+      <p:sp>
+        <p:nvSpPr>
+          <p:cNvPr id="405" name="Text 405"/>
+          <p:cNvSpPr txBox="1"/>
+          <p:nvPr/>
+        </p:nvSpPr>
+        <p:spPr>
+          <a:xfrm>
+            <a:off x="457200" y="6350000"/>
+            <a:ext cx="6096000" cy="254000"/>
+          </a:xfrm>
+          <a:prstGeom prst="rect">
+            <a:avLst/>
+          </a:prstGeom>
+          <a:noFill/>
+        </p:spPr>
+        <p:txBody>
+          <a:bodyPr wrap="square" lIns="0" tIns="0" rIns="0" bIns="0">
+            <a:normAutofit/>
+          </a:bodyPr>
+          <a:lstStyle/>
+          <a:p>
+            <a:pPr algn="l">
+              <a:buNone/>
+            </a:pPr>
+            <a:r>
+              <a:rPr lang="en-US" sz="1400" dirty="0">
+                <a:solidFill>
+                  <a:srgbClr val="8A98A5"/>
+                </a:solidFill>
+              </a:rPr>
+              <a:t>Cox Proportional Hazards Model  |  Employee Attrition Analysis</a:t>
+            </a:r>
+          </a:p>
+        </p:txBody>
+      </p:sp>
+      <p:sp>
+        <p:nvSpPr>
+          <p:cNvPr id="406" name="Text 406"/>
+          <p:cNvSpPr txBox="1"/>
+          <p:nvPr/>
+        </p:nvSpPr>
+        <p:spPr>
+          <a:xfrm>
+            <a:off x="7670800" y="6350000"/>
+            <a:ext cx="1016000" cy="254000"/>
+          </a:xfrm>
+          <a:prstGeom prst="rect">
+            <a:avLst/>
+          </a:prstGeom>
+          <a:noFill/>
+        </p:spPr>
+        <p:txBody>
+          <a:bodyPr wrap="square" lIns="0" tIns="0" rIns="0" bIns="0">
+            <a:normAutofit/>
+          </a:bodyPr>
+          <a:lstStyle/>
+          <a:p>
+            <a:pPr algn="r">
+              <a:buNone/>
+            </a:pPr>
+            <a:r>
+              <a:rPr lang="en-US" sz="1400" b="1" dirty="0">
+                <a:solidFill>
+                  <a:srgbClr val="14324B"/>
+                </a:solidFill>
+              </a:rPr>
+              <a:t>03</a:t>
+            </a:r>
+          </a:p>
+        </p:txBody>
+      </p:sp>
+      <p:sp>
+        <p:nvSpPr>
+          <p:cNvPr id="407" name="Text 407"/>
+          <p:cNvSpPr txBox="1"/>
+          <p:nvPr/>
+        </p:nvSpPr>
+        <p:spPr>
+          <a:xfrm>
+            <a:off x="457200" y="1447800"/>
+            <a:ext cx="4826000" cy="254000"/>
+          </a:xfrm>
+          <a:prstGeom prst="rect">
+            <a:avLst/>
+          </a:prstGeom>
+          <a:noFill/>
+        </p:spPr>
+        <p:txBody>
+          <a:bodyPr wrap="square" lIns="0" tIns="0" rIns="0" bIns="0">
+            <a:normAutofit/>
+          </a:bodyPr>
+          <a:lstStyle/>
+          <a:p>
+            <a:pPr algn="l">
+              <a:buNone/>
+            </a:pPr>
+            <a:r>
+              <a:rPr lang="en-US" sz="1400" b="1" spc="240" dirty="0">
+                <a:solidFill>
+                  <a:srgbClr val="6B7C8C"/>
+                </a:solidFill>
+              </a:rPr>
+              <a:t>KAPLAN–MEIER SURVIVAL CURVES</a:t>
+            </a:r>
+          </a:p>
+        </p:txBody>
+      </p:sp>
+      <p:sp>
+        <p:nvSpPr>
+          <p:cNvPr id="408" name="Text 408"/>
+          <p:cNvSpPr txBox="1"/>
+          <p:nvPr/>
+        </p:nvSpPr>
+        <p:spPr>
+          <a:xfrm>
+            <a:off x="5740400" y="1447800"/>
+            <a:ext cx="3048000" cy="254000"/>
+          </a:xfrm>
+          <a:prstGeom prst="rect">
+            <a:avLst/>
+          </a:prstGeom>
+          <a:noFill/>
+        </p:spPr>
+        <p:txBody>
+          <a:bodyPr wrap="square" lIns="0" tIns="0" rIns="0" bIns="0">
+            <a:normAutofit/>
+          </a:bodyPr>
+          <a:lstStyle/>
+          <a:p>
+            <a:pPr algn="l">
+              <a:buNone/>
+            </a:pPr>
+            <a:r>
+              <a:rPr lang="en-US" sz="1400" b="1" spc="240" dirty="0">
+                <a:solidFill>
+                  <a:srgbClr val="6B7C8C"/>
+                </a:solidFill>
+              </a:rPr>
+              <a:t>SIGNIFICANCE TEST</a:t>
+            </a:r>
+          </a:p>
+        </p:txBody>
+      </p:sp>
+      <p:sp>
+        <p:nvSpPr>
+          <p:cNvPr id="411" name="Text 411"/>
+          <p:cNvSpPr txBox="1"/>
+          <p:nvPr/>
+        </p:nvSpPr>
+        <p:spPr>
+          <a:xfrm>
+            <a:off x="5994400" y="1955800"/>
+            <a:ext cx="2489200" cy="1320800"/>
+          </a:xfrm>
+          <a:prstGeom prst="rect">
+            <a:avLst/>
+          </a:prstGeom>
+          <a:noFill/>
+        </p:spPr>
+        <p:txBody>
+          <a:bodyPr wrap="square" lIns="0" tIns="0" rIns="0" bIns="0">
+            <a:normAutofit lnSpcReduction="10000"/>
+          </a:bodyPr>
+          <a:lstStyle/>
+          <a:p>
+            <a:pPr algn="l">
+              <a:spcAft>
+                <a:spcPts val="300"/>
+              </a:spcAft>
+              <a:buNone/>
+            </a:pPr>
+            <a:r>
+              <a:rPr lang="en-US" sz="3200" b="1" dirty="0">
+                <a:solidFill>
+                  <a:srgbClr val="14324B"/>
+                </a:solidFill>
+              </a:rPr>
+              <a:t>p = 1.6e-19</a:t>
+            </a:r>
+          </a:p>
+          <a:p>
+            <a:pPr algn="l">
+              <a:lnSpc>
+                <a:spcPct val="100000"/>
+              </a:lnSpc>
+              <a:buNone/>
+            </a:pPr>
+            <a:r>
+              <a:rPr lang="en-US" sz="1400" dirty="0">
+                <a:solidFill>
+                  <a:srgbClr val="6B7C8C"/>
+                </a:solidFill>
+              </a:rPr>
+              <a:t>Log-rank test — the retention gap between overtime and non-overtime staff is statistically significant.</a:t>
+            </a:r>
+          </a:p>
+        </p:txBody>
+      </p:sp>
+      <p:sp>
+        <p:nvSpPr>
+          <p:cNvPr id="414" name="Text 414"/>
+          <p:cNvSpPr txBox="1"/>
+          <p:nvPr/>
+        </p:nvSpPr>
+        <p:spPr>
+          <a:xfrm>
+            <a:off x="5994400" y="3810000"/>
+            <a:ext cx="2489200" cy="254000"/>
+          </a:xfrm>
+          <a:prstGeom prst="rect">
+            <a:avLst/>
+          </a:prstGeom>
+          <a:noFill/>
+        </p:spPr>
+        <p:txBody>
+          <a:bodyPr wrap="square" lIns="0" tIns="0" rIns="0" bIns="0">
+            <a:normAutofit/>
+          </a:bodyPr>
+          <a:lstStyle/>
+          <a:p>
+            <a:pPr algn="l">
+              <a:buNone/>
+            </a:pPr>
+            <a:r>
+              <a:rPr lang="en-US" sz="1400" b="1" spc="200" dirty="0">
+                <a:solidFill>
+                  <a:srgbClr val="C9772F"/>
+                </a:solidFill>
+              </a:rPr>
+              <a:t>SO WHAT</a:t>
+            </a:r>
+          </a:p>
+        </p:txBody>
+      </p:sp>
+      <p:sp>
+        <p:nvSpPr>
+          <p:cNvPr id="415" name="Text 415"/>
+          <p:cNvSpPr txBox="1"/>
+          <p:nvPr/>
+        </p:nvSpPr>
+        <p:spPr>
+          <a:xfrm>
+            <a:off x="457200" y="5638800"/>
+            <a:ext cx="5029200" cy="508000"/>
+          </a:xfrm>
+          <a:prstGeom prst="rect">
+            <a:avLst/>
+          </a:prstGeom>
+          <a:noFill/>
+        </p:spPr>
+        <p:txBody>
+          <a:bodyPr wrap="square" lIns="0" tIns="0" rIns="0" bIns="0">
+            <a:normAutofit/>
+          </a:bodyPr>
+          <a:lstStyle/>
+          <a:p>
+            <a:pPr algn="l">
+              <a:lnSpc>
+                <a:spcPct val="100000"/>
+              </a:lnSpc>
+              <a:buNone/>
+            </a:pPr>
+            <a:r>
+              <a:rPr lang="en-US" sz="1400" i="1" dirty="0">
+                <a:solidFill>
+                  <a:srgbClr val="8A98A5"/>
+                </a:solidFill>
+              </a:rPr>
+              <a:t>Curves show the share of employees still retained over tenure, split by overtime status.</a:t>
             </a:r>
           </a:p>
         </p:txBody>
       </p:sp>
     </p:spTree>
+    <p:extLst>
+      <p:ext uri="{BB962C8B-B14F-4D97-AF65-F5344CB8AC3E}">
+        <p14:creationId xmlns:p14="http://schemas.microsoft.com/office/powerpoint/2010/main" val="2411773813"/>
+      </p:ext>
+    </p:extLst>
   </p:cSld>
   <p:clrMapOvr>
     <a:masterClrMapping/>
@@ -3444,7 +5684,7 @@
 </file>
 
 <file path=ppt/slides/slide4.xml><?xml version="1.0" encoding="utf-8"?>
-<p:sld xmlns:a="http://schemas.openxmlformats.org/drawingml/2006/main" xmlns:p="http://schemas.openxmlformats.org/presentationml/2006/main" xmlns:r="http://schemas.openxmlformats.org/officeDocument/2006/relationships">
+<p:sld xmlns:a="http://schemas.openxmlformats.org/drawingml/2006/main" xmlns:r="http://schemas.openxmlformats.org/officeDocument/2006/relationships" xmlns:p="http://schemas.openxmlformats.org/presentationml/2006/main">
   <p:cSld>
     <p:spTree>
       <p:nvGrpSpPr>
@@ -3452,7 +5692,355 @@
         <p:cNvGrpSpPr/>
         <p:nvPr/>
       </p:nvGrpSpPr>
-      <p:grpSpPr/>
+      <p:grpSpPr>
+        <a:xfrm>
+          <a:off x="0" y="0"/>
+          <a:ext cx="0" cy="0"/>
+          <a:chOff x="0" y="0"/>
+          <a:chExt cx="0" cy="0"/>
+        </a:xfrm>
+      </p:grpSpPr>
+      <p:sp>
+        <p:nvSpPr>
+          <p:cNvPr id="501" name="Shape 501"/>
+          <p:cNvSpPr/>
+          <p:nvPr/>
+        </p:nvSpPr>
+        <p:spPr>
+          <a:xfrm>
+            <a:off x="0" y="0"/>
+            <a:ext cx="9144000" cy="1219200"/>
+          </a:xfrm>
+          <a:prstGeom prst="rect">
+            <a:avLst/>
+          </a:prstGeom>
+          <a:solidFill>
+            <a:srgbClr val="14324B"/>
+          </a:solidFill>
+          <a:ln>
+            <a:noFill/>
+          </a:ln>
+        </p:spPr>
+        <p:txBody>
+          <a:bodyPr wrap="square" lIns="0" tIns="0" rIns="0" bIns="0">
+            <a:normAutofit/>
+          </a:bodyPr>
+          <a:lstStyle/>
+          <a:p>
+            <a:endParaRPr lang="en-US"/>
+          </a:p>
+        </p:txBody>
+      </p:sp>
+      <p:sp>
+        <p:nvSpPr>
+          <p:cNvPr id="502" name="Shape 502"/>
+          <p:cNvSpPr/>
+          <p:nvPr/>
+        </p:nvSpPr>
+        <p:spPr>
+          <a:xfrm>
+            <a:off x="0" y="1219200"/>
+            <a:ext cx="9144000" cy="63500"/>
+          </a:xfrm>
+          <a:prstGeom prst="rect">
+            <a:avLst/>
+          </a:prstGeom>
+          <a:solidFill>
+            <a:srgbClr val="C9772F"/>
+          </a:solidFill>
+          <a:ln>
+            <a:noFill/>
+          </a:ln>
+        </p:spPr>
+        <p:txBody>
+          <a:bodyPr wrap="square" lIns="0" tIns="0" rIns="0" bIns="0">
+            <a:normAutofit fontScale="25000" lnSpcReduction="20000"/>
+          </a:bodyPr>
+          <a:lstStyle/>
+          <a:p>
+            <a:endParaRPr lang="en-US"/>
+          </a:p>
+        </p:txBody>
+      </p:sp>
+      <p:sp>
+        <p:nvSpPr>
+          <p:cNvPr id="503" name="Shape 503"/>
+          <p:cNvSpPr/>
+          <p:nvPr/>
+        </p:nvSpPr>
+        <p:spPr>
+          <a:xfrm>
+            <a:off x="457200" y="6248400"/>
+            <a:ext cx="8229600" cy="12700"/>
+          </a:xfrm>
+          <a:prstGeom prst="rect">
+            <a:avLst/>
+          </a:prstGeom>
+          <a:solidFill>
+            <a:srgbClr val="DCE3EA"/>
+          </a:solidFill>
+          <a:ln>
+            <a:noFill/>
+          </a:ln>
+        </p:spPr>
+        <p:txBody>
+          <a:bodyPr wrap="square" lIns="0" tIns="0" rIns="0" bIns="0">
+            <a:normAutofit fontScale="25000" lnSpcReduction="20000"/>
+          </a:bodyPr>
+          <a:lstStyle/>
+          <a:p>
+            <a:endParaRPr lang="en-US"/>
+          </a:p>
+        </p:txBody>
+      </p:sp>
+      <p:sp>
+        <p:nvSpPr>
+          <p:cNvPr id="508" name="Shape 508"/>
+          <p:cNvSpPr/>
+          <p:nvPr/>
+        </p:nvSpPr>
+        <p:spPr>
+          <a:xfrm>
+            <a:off x="457200" y="4622800"/>
+            <a:ext cx="2641600" cy="1270000"/>
+          </a:xfrm>
+          <a:prstGeom prst="rect">
+            <a:avLst/>
+          </a:prstGeom>
+          <a:solidFill>
+            <a:srgbClr val="F8FAFC"/>
+          </a:solidFill>
+          <a:ln w="12700">
+            <a:solidFill>
+              <a:srgbClr val="DCE3EA"/>
+            </a:solidFill>
+          </a:ln>
+        </p:spPr>
+        <p:txBody>
+          <a:bodyPr wrap="square" lIns="228600" tIns="177800" rIns="152400" bIns="101600">
+            <a:normAutofit/>
+          </a:bodyPr>
+          <a:lstStyle/>
+          <a:p>
+            <a:pPr algn="l">
+              <a:spcAft>
+                <a:spcPts val="300"/>
+              </a:spcAft>
+              <a:buNone/>
+            </a:pPr>
+            <a:r>
+              <a:rPr lang="en-US" sz="3200" b="1" dirty="0">
+                <a:solidFill>
+                  <a:srgbClr val="14324B"/>
+                </a:solidFill>
+              </a:rPr>
+              <a:t>1,233</a:t>
+            </a:r>
+          </a:p>
+          <a:p>
+            <a:pPr algn="l">
+              <a:lnSpc>
+                <a:spcPct val="100000"/>
+              </a:lnSpc>
+              <a:buNone/>
+            </a:pPr>
+            <a:r>
+              <a:rPr lang="en-US" sz="1400" dirty="0">
+                <a:solidFill>
+                  <a:srgbClr val="6B7C8C"/>
+                </a:solidFill>
+              </a:rPr>
+              <a:t>Current employees scored</a:t>
+            </a:r>
+          </a:p>
+        </p:txBody>
+      </p:sp>
+      <p:sp>
+        <p:nvSpPr>
+          <p:cNvPr id="509" name="Shape 509"/>
+          <p:cNvSpPr/>
+          <p:nvPr/>
+        </p:nvSpPr>
+        <p:spPr>
+          <a:xfrm>
+            <a:off x="457200" y="4622800"/>
+            <a:ext cx="50800" cy="1270000"/>
+          </a:xfrm>
+          <a:prstGeom prst="rect">
+            <a:avLst/>
+          </a:prstGeom>
+          <a:solidFill>
+            <a:srgbClr val="14324B"/>
+          </a:solidFill>
+          <a:ln>
+            <a:noFill/>
+          </a:ln>
+        </p:spPr>
+        <p:txBody>
+          <a:bodyPr wrap="square" lIns="0" tIns="0" rIns="0" bIns="0">
+            <a:normAutofit/>
+          </a:bodyPr>
+          <a:lstStyle/>
+          <a:p>
+            <a:endParaRPr lang="en-US"/>
+          </a:p>
+        </p:txBody>
+      </p:sp>
+      <p:sp>
+        <p:nvSpPr>
+          <p:cNvPr id="510" name="Shape 510"/>
+          <p:cNvSpPr/>
+          <p:nvPr/>
+        </p:nvSpPr>
+        <p:spPr>
+          <a:xfrm>
+            <a:off x="3251200" y="4622800"/>
+            <a:ext cx="2641600" cy="1270000"/>
+          </a:xfrm>
+          <a:prstGeom prst="rect">
+            <a:avLst/>
+          </a:prstGeom>
+          <a:solidFill>
+            <a:srgbClr val="F8FAFC"/>
+          </a:solidFill>
+          <a:ln w="12700">
+            <a:solidFill>
+              <a:srgbClr val="DCE3EA"/>
+            </a:solidFill>
+          </a:ln>
+        </p:spPr>
+        <p:txBody>
+          <a:bodyPr wrap="square" lIns="228600" tIns="177800" rIns="152400" bIns="101600">
+            <a:normAutofit/>
+          </a:bodyPr>
+          <a:lstStyle/>
+          <a:p>
+            <a:pPr algn="l">
+              <a:spcAft>
+                <a:spcPts val="300"/>
+              </a:spcAft>
+              <a:buNone/>
+            </a:pPr>
+            <a:r>
+              <a:rPr lang="en-US" sz="3200" b="1" dirty="0">
+                <a:solidFill>
+                  <a:srgbClr val="B0413E"/>
+                </a:solidFill>
+              </a:rPr>
+              <a:t>8.19</a:t>
+            </a:r>
+          </a:p>
+          <a:p>
+            <a:pPr algn="l">
+              <a:lnSpc>
+                <a:spcPct val="100000"/>
+              </a:lnSpc>
+              <a:buNone/>
+            </a:pPr>
+            <a:r>
+              <a:rPr lang="en-US" sz="1400" dirty="0">
+                <a:solidFill>
+                  <a:srgbClr val="6B7C8C"/>
+                </a:solidFill>
+              </a:rPr>
+              <a:t>Highest risk score vs. median 0.98</a:t>
+            </a:r>
+          </a:p>
+        </p:txBody>
+      </p:sp>
+      <p:sp>
+        <p:nvSpPr>
+          <p:cNvPr id="511" name="Shape 511"/>
+          <p:cNvSpPr/>
+          <p:nvPr/>
+        </p:nvSpPr>
+        <p:spPr>
+          <a:xfrm>
+            <a:off x="3251200" y="4622800"/>
+            <a:ext cx="50800" cy="1270000"/>
+          </a:xfrm>
+          <a:prstGeom prst="rect">
+            <a:avLst/>
+          </a:prstGeom>
+          <a:solidFill>
+            <a:srgbClr val="B0413E"/>
+          </a:solidFill>
+          <a:ln>
+            <a:noFill/>
+          </a:ln>
+        </p:spPr>
+        <p:txBody>
+          <a:bodyPr wrap="square" lIns="0" tIns="0" rIns="0" bIns="0">
+            <a:normAutofit/>
+          </a:bodyPr>
+          <a:lstStyle/>
+          <a:p>
+            <a:endParaRPr lang="en-US"/>
+          </a:p>
+        </p:txBody>
+      </p:sp>
+      <p:sp>
+        <p:nvSpPr>
+          <p:cNvPr id="512" name="Shape 512"/>
+          <p:cNvSpPr/>
+          <p:nvPr/>
+        </p:nvSpPr>
+        <p:spPr>
+          <a:xfrm>
+            <a:off x="6045200" y="4622800"/>
+            <a:ext cx="2641600" cy="1270000"/>
+          </a:xfrm>
+          <a:prstGeom prst="rect">
+            <a:avLst/>
+          </a:prstGeom>
+          <a:solidFill>
+            <a:srgbClr val="F1F5F9"/>
+          </a:solidFill>
+          <a:ln>
+            <a:noFill/>
+          </a:ln>
+        </p:spPr>
+        <p:txBody>
+          <a:bodyPr wrap="square" lIns="0" tIns="0" rIns="0" bIns="0">
+            <a:normAutofit/>
+          </a:bodyPr>
+          <a:lstStyle/>
+          <a:p>
+            <a:endParaRPr lang="en-US"/>
+          </a:p>
+        </p:txBody>
+      </p:sp>
+      <p:sp>
+        <p:nvSpPr>
+          <p:cNvPr id="513" name="Shape 513"/>
+          <p:cNvSpPr/>
+          <p:nvPr/>
+        </p:nvSpPr>
+        <p:spPr>
+          <a:xfrm>
+            <a:off x="6045200" y="4622800"/>
+            <a:ext cx="50800" cy="1270000"/>
+          </a:xfrm>
+          <a:prstGeom prst="rect">
+            <a:avLst/>
+          </a:prstGeom>
+          <a:solidFill>
+            <a:srgbClr val="C9772F"/>
+          </a:solidFill>
+          <a:ln>
+            <a:noFill/>
+          </a:ln>
+        </p:spPr>
+        <p:txBody>
+          <a:bodyPr wrap="square" lIns="0" tIns="0" rIns="0" bIns="0">
+            <a:normAutofit/>
+          </a:bodyPr>
+          <a:lstStyle/>
+          <a:p>
+            <a:endParaRPr lang="en-US"/>
+          </a:p>
+        </p:txBody>
+      </p:sp>
       <p:sp>
         <p:nvSpPr>
           <p:cNvPr id="2" name="TextBox 1"/>
@@ -3461,8 +6049,8 @@
         </p:nvSpPr>
         <p:spPr>
           <a:xfrm>
-            <a:off x="365760" y="274320"/>
-            <a:ext cx="8412480" cy="731520"/>
+            <a:off x="457200" y="584200"/>
+            <a:ext cx="7874000" cy="492443"/>
           </a:xfrm>
           <a:prstGeom prst="rect">
             <a:avLst/>
@@ -3470,23 +6058,28 @@
           <a:noFill/>
         </p:spPr>
         <p:txBody>
-          <a:bodyPr wrap="none">
+          <a:bodyPr wrap="square" lIns="0" tIns="0" rIns="0" bIns="0">
             <a:spAutoFit/>
           </a:bodyPr>
           <a:lstStyle/>
           <a:p>
-            <a:pPr>
-              <a:defRPr sz="2800" b="1"/>
-            </a:pPr>
-            <a:r>
-              <a:t>Retention by Overtime Status</a:t>
+            <a:pPr algn="l">
+              <a:buNone/>
+            </a:pPr>
+            <a:r>
+              <a:rPr lang="en-US" sz="3200" b="1" dirty="0">
+                <a:solidFill>
+                  <a:srgbClr val="FFFFFF"/>
+                </a:solidFill>
+              </a:rPr>
+              <a:t>Who Is at Risk Right Now</a:t>
             </a:r>
           </a:p>
         </p:txBody>
       </p:sp>
       <p:pic>
         <p:nvPicPr>
-          <p:cNvPr id="3" name="Picture 2" descr="km_overtime.png"/>
+          <p:cNvPr id="3" name="Picture 2" descr="risk_distribution.png"/>
           <p:cNvPicPr>
             <a:picLocks noChangeAspect="1"/>
           </p:cNvPicPr>
@@ -3500,8 +6093,8 @@
         </p:blipFill>
         <p:spPr>
           <a:xfrm>
-            <a:off x="365760" y="1188720"/>
-            <a:ext cx="5486400" cy="4114800"/>
+            <a:off x="635000" y="1752600"/>
+            <a:ext cx="7874000" cy="2806700"/>
           </a:xfrm>
           <a:prstGeom prst="rect">
             <a:avLst/>
@@ -3516,8 +6109,8 @@
         </p:nvSpPr>
         <p:spPr>
           <a:xfrm>
-            <a:off x="6035040" y="1188720"/>
-            <a:ext cx="2743200" cy="5029200"/>
+            <a:off x="6299200" y="5080000"/>
+            <a:ext cx="2235200" cy="646331"/>
           </a:xfrm>
           <a:prstGeom prst="rect">
             <a:avLst/>
@@ -3525,29 +6118,214 @@
           <a:noFill/>
         </p:spPr>
         <p:txBody>
-          <a:bodyPr wrap="square">
+          <a:bodyPr wrap="square" lIns="0" tIns="0" rIns="0" bIns="0">
             <a:spAutoFit/>
           </a:bodyPr>
           <a:lstStyle/>
           <a:p>
-            <a:pPr>
-              <a:defRPr sz="1400"/>
-            </a:pPr>
-            <a:r>
-              <a:t>- Log-rank test p = 1.6e-19 -- the retention gap is statistically significant.</a:t>
-            </a:r>
-          </a:p>
-          <a:p>
-            <a:pPr>
-              <a:defRPr sz="1400"/>
-            </a:pPr>
-            <a:r>
-              <a:t>- Overtime is the single most directly actionable factor found.</a:t>
+            <a:pPr algn="l">
+              <a:lnSpc>
+                <a:spcPct val="100000"/>
+              </a:lnSpc>
+              <a:buNone/>
+            </a:pPr>
+            <a:r>
+              <a:rPr lang="en-US" sz="1400" dirty="0">
+                <a:solidFill>
+                  <a:srgbClr val="1F2933"/>
+                </a:solidFill>
+              </a:rPr>
+              <a:t>Open retention conversations with the 15 employees listed above.</a:t>
+            </a:r>
+          </a:p>
+        </p:txBody>
+      </p:sp>
+      <p:sp>
+        <p:nvSpPr>
+          <p:cNvPr id="504" name="Text 504"/>
+          <p:cNvSpPr txBox="1"/>
+          <p:nvPr/>
+        </p:nvSpPr>
+        <p:spPr>
+          <a:xfrm>
+            <a:off x="457200" y="279400"/>
+            <a:ext cx="7874000" cy="254000"/>
+          </a:xfrm>
+          <a:prstGeom prst="rect">
+            <a:avLst/>
+          </a:prstGeom>
+          <a:noFill/>
+        </p:spPr>
+        <p:txBody>
+          <a:bodyPr wrap="square" lIns="0" tIns="0" rIns="0" bIns="0">
+            <a:normAutofit/>
+          </a:bodyPr>
+          <a:lstStyle/>
+          <a:p>
+            <a:pPr algn="l">
+              <a:buNone/>
+            </a:pPr>
+            <a:r>
+              <a:rPr lang="en-US" sz="1400" b="1" spc="300" dirty="0">
+                <a:solidFill>
+                  <a:srgbClr val="9FB6C9"/>
+                </a:solidFill>
+              </a:rPr>
+              <a:t>EXECUTIVE REPORT   |   SURVIVAL ANALYSIS</a:t>
+            </a:r>
+          </a:p>
+        </p:txBody>
+      </p:sp>
+      <p:sp>
+        <p:nvSpPr>
+          <p:cNvPr id="505" name="Text 505"/>
+          <p:cNvSpPr txBox="1"/>
+          <p:nvPr/>
+        </p:nvSpPr>
+        <p:spPr>
+          <a:xfrm>
+            <a:off x="457200" y="6350000"/>
+            <a:ext cx="6096000" cy="254000"/>
+          </a:xfrm>
+          <a:prstGeom prst="rect">
+            <a:avLst/>
+          </a:prstGeom>
+          <a:noFill/>
+        </p:spPr>
+        <p:txBody>
+          <a:bodyPr wrap="square" lIns="0" tIns="0" rIns="0" bIns="0">
+            <a:normAutofit/>
+          </a:bodyPr>
+          <a:lstStyle/>
+          <a:p>
+            <a:pPr algn="l">
+              <a:buNone/>
+            </a:pPr>
+            <a:r>
+              <a:rPr lang="en-US" sz="1400" dirty="0">
+                <a:solidFill>
+                  <a:srgbClr val="8A98A5"/>
+                </a:solidFill>
+              </a:rPr>
+              <a:t>Cox Proportional Hazards Model  |  Employee Attrition Analysis</a:t>
+            </a:r>
+          </a:p>
+        </p:txBody>
+      </p:sp>
+      <p:sp>
+        <p:nvSpPr>
+          <p:cNvPr id="506" name="Text 506"/>
+          <p:cNvSpPr txBox="1"/>
+          <p:nvPr/>
+        </p:nvSpPr>
+        <p:spPr>
+          <a:xfrm>
+            <a:off x="7670800" y="6350000"/>
+            <a:ext cx="1016000" cy="254000"/>
+          </a:xfrm>
+          <a:prstGeom prst="rect">
+            <a:avLst/>
+          </a:prstGeom>
+          <a:noFill/>
+        </p:spPr>
+        <p:txBody>
+          <a:bodyPr wrap="square" lIns="0" tIns="0" rIns="0" bIns="0">
+            <a:normAutofit/>
+          </a:bodyPr>
+          <a:lstStyle/>
+          <a:p>
+            <a:pPr algn="r">
+              <a:buNone/>
+            </a:pPr>
+            <a:r>
+              <a:rPr lang="en-US" sz="1400" b="1" dirty="0">
+                <a:solidFill>
+                  <a:srgbClr val="14324B"/>
+                </a:solidFill>
+              </a:rPr>
+              <a:t>04</a:t>
+            </a:r>
+          </a:p>
+        </p:txBody>
+      </p:sp>
+      <p:sp>
+        <p:nvSpPr>
+          <p:cNvPr id="507" name="Text 507"/>
+          <p:cNvSpPr txBox="1"/>
+          <p:nvPr/>
+        </p:nvSpPr>
+        <p:spPr>
+          <a:xfrm>
+            <a:off x="457200" y="1447800"/>
+            <a:ext cx="6096000" cy="254000"/>
+          </a:xfrm>
+          <a:prstGeom prst="rect">
+            <a:avLst/>
+          </a:prstGeom>
+          <a:noFill/>
+        </p:spPr>
+        <p:txBody>
+          <a:bodyPr wrap="square" lIns="0" tIns="0" rIns="0" bIns="0">
+            <a:normAutofit/>
+          </a:bodyPr>
+          <a:lstStyle/>
+          <a:p>
+            <a:pPr algn="l">
+              <a:buNone/>
+            </a:pPr>
+            <a:r>
+              <a:rPr lang="en-US" sz="1400" b="1" spc="240" dirty="0">
+                <a:solidFill>
+                  <a:srgbClr val="6B7C8C"/>
+                </a:solidFill>
+              </a:rPr>
+              <a:t>TOP 15 EMPLOYEES BY 1-YEAR LEAVE PROBABILITY</a:t>
+            </a:r>
+          </a:p>
+        </p:txBody>
+      </p:sp>
+      <p:sp>
+        <p:nvSpPr>
+          <p:cNvPr id="514" name="Text 514"/>
+          <p:cNvSpPr txBox="1"/>
+          <p:nvPr/>
+        </p:nvSpPr>
+        <p:spPr>
+          <a:xfrm>
+            <a:off x="6299200" y="4800600"/>
+            <a:ext cx="2235200" cy="228600"/>
+          </a:xfrm>
+          <a:prstGeom prst="rect">
+            <a:avLst/>
+          </a:prstGeom>
+          <a:noFill/>
+        </p:spPr>
+        <p:txBody>
+          <a:bodyPr wrap="square" lIns="0" tIns="0" rIns="0" bIns="0">
+            <a:normAutofit/>
+          </a:bodyPr>
+          <a:lstStyle/>
+          <a:p>
+            <a:pPr algn="l">
+              <a:buNone/>
+            </a:pPr>
+            <a:r>
+              <a:rPr lang="en-US" sz="1400" b="1" spc="200" dirty="0">
+                <a:solidFill>
+                  <a:srgbClr val="C9772F"/>
+                </a:solidFill>
+              </a:rPr>
+              <a:t>NEXT STEP</a:t>
             </a:r>
           </a:p>
         </p:txBody>
       </p:sp>
     </p:spTree>
+    <p:extLst>
+      <p:ext uri="{BB962C8B-B14F-4D97-AF65-F5344CB8AC3E}">
+        <p14:creationId xmlns:p14="http://schemas.microsoft.com/office/powerpoint/2010/main" val="4143077237"/>
+      </p:ext>
+    </p:extLst>
   </p:cSld>
   <p:clrMapOvr>
     <a:masterClrMapping/>
@@ -3556,7 +6334,7 @@
 </file>
 
 <file path=ppt/slides/slide5.xml><?xml version="1.0" encoding="utf-8"?>
-<p:sld xmlns:a="http://schemas.openxmlformats.org/drawingml/2006/main" xmlns:p="http://schemas.openxmlformats.org/presentationml/2006/main" xmlns:r="http://schemas.openxmlformats.org/officeDocument/2006/relationships">
+<p:sld xmlns:a="http://schemas.openxmlformats.org/drawingml/2006/main" xmlns:r="http://schemas.openxmlformats.org/officeDocument/2006/relationships" xmlns:p="http://schemas.openxmlformats.org/presentationml/2006/main">
   <p:cSld>
     <p:spTree>
       <p:nvGrpSpPr>
@@ -3564,7 +6342,609 @@
         <p:cNvGrpSpPr/>
         <p:nvPr/>
       </p:nvGrpSpPr>
-      <p:grpSpPr/>
+      <p:grpSpPr>
+        <a:xfrm>
+          <a:off x="0" y="0"/>
+          <a:ext cx="0" cy="0"/>
+          <a:chOff x="0" y="0"/>
+          <a:chExt cx="0" cy="0"/>
+        </a:xfrm>
+      </p:grpSpPr>
+      <p:sp>
+        <p:nvSpPr>
+          <p:cNvPr id="101" name="Shape 101"/>
+          <p:cNvSpPr/>
+          <p:nvPr/>
+        </p:nvSpPr>
+        <p:spPr>
+          <a:xfrm>
+            <a:off x="0" y="0"/>
+            <a:ext cx="9144000" cy="1219200"/>
+          </a:xfrm>
+          <a:prstGeom prst="rect">
+            <a:avLst/>
+          </a:prstGeom>
+          <a:solidFill>
+            <a:srgbClr val="14324B"/>
+          </a:solidFill>
+          <a:ln>
+            <a:noFill/>
+          </a:ln>
+        </p:spPr>
+        <p:txBody>
+          <a:bodyPr wrap="square" lIns="0" tIns="0" rIns="0" bIns="0" anchor="t">
+            <a:normAutofit/>
+          </a:bodyPr>
+          <a:lstStyle/>
+          <a:p>
+            <a:endParaRPr lang="en-US"/>
+          </a:p>
+        </p:txBody>
+      </p:sp>
+      <p:sp>
+        <p:nvSpPr>
+          <p:cNvPr id="102" name="Shape 102"/>
+          <p:cNvSpPr/>
+          <p:nvPr/>
+        </p:nvSpPr>
+        <p:spPr>
+          <a:xfrm>
+            <a:off x="0" y="1219200"/>
+            <a:ext cx="9144000" cy="63500"/>
+          </a:xfrm>
+          <a:prstGeom prst="rect">
+            <a:avLst/>
+          </a:prstGeom>
+          <a:solidFill>
+            <a:srgbClr val="C9772F"/>
+          </a:solidFill>
+          <a:ln>
+            <a:noFill/>
+          </a:ln>
+        </p:spPr>
+        <p:txBody>
+          <a:bodyPr wrap="square" lIns="0" tIns="0" rIns="0" bIns="0" anchor="t">
+            <a:normAutofit fontScale="25000" lnSpcReduction="20000"/>
+          </a:bodyPr>
+          <a:lstStyle/>
+          <a:p>
+            <a:endParaRPr lang="en-US"/>
+          </a:p>
+        </p:txBody>
+      </p:sp>
+      <p:sp>
+        <p:nvSpPr>
+          <p:cNvPr id="103" name="Shape 103"/>
+          <p:cNvSpPr/>
+          <p:nvPr/>
+        </p:nvSpPr>
+        <p:spPr>
+          <a:xfrm>
+            <a:off x="457200" y="1549400"/>
+            <a:ext cx="8229600" cy="939800"/>
+          </a:xfrm>
+          <a:prstGeom prst="rect">
+            <a:avLst/>
+          </a:prstGeom>
+          <a:solidFill>
+            <a:srgbClr val="F1F5F9"/>
+          </a:solidFill>
+          <a:ln>
+            <a:noFill/>
+          </a:ln>
+        </p:spPr>
+        <p:txBody>
+          <a:bodyPr wrap="square" lIns="0" tIns="0" rIns="0" bIns="0" anchor="t">
+            <a:normAutofit/>
+          </a:bodyPr>
+          <a:lstStyle/>
+          <a:p>
+            <a:endParaRPr lang="en-US"/>
+          </a:p>
+        </p:txBody>
+      </p:sp>
+      <p:sp>
+        <p:nvSpPr>
+          <p:cNvPr id="104" name="Shape 104"/>
+          <p:cNvSpPr/>
+          <p:nvPr/>
+        </p:nvSpPr>
+        <p:spPr>
+          <a:xfrm>
+            <a:off x="457200" y="1549400"/>
+            <a:ext cx="76200" cy="939800"/>
+          </a:xfrm>
+          <a:prstGeom prst="rect">
+            <a:avLst/>
+          </a:prstGeom>
+          <a:solidFill>
+            <a:srgbClr val="C9772F"/>
+          </a:solidFill>
+          <a:ln>
+            <a:noFill/>
+          </a:ln>
+        </p:spPr>
+        <p:txBody>
+          <a:bodyPr wrap="square" lIns="0" tIns="0" rIns="0" bIns="0" anchor="t">
+            <a:normAutofit/>
+          </a:bodyPr>
+          <a:lstStyle/>
+          <a:p>
+            <a:endParaRPr lang="en-US"/>
+          </a:p>
+        </p:txBody>
+      </p:sp>
+      <p:sp>
+        <p:nvSpPr>
+          <p:cNvPr id="105" name="Shape 105"/>
+          <p:cNvSpPr/>
+          <p:nvPr/>
+        </p:nvSpPr>
+        <p:spPr>
+          <a:xfrm>
+            <a:off x="457200" y="3098800"/>
+            <a:ext cx="4013200" cy="1371600"/>
+          </a:xfrm>
+          <a:prstGeom prst="rect">
+            <a:avLst/>
+          </a:prstGeom>
+          <a:solidFill>
+            <a:srgbClr val="F8FAFC"/>
+          </a:solidFill>
+          <a:ln w="12700">
+            <a:solidFill>
+              <a:srgbClr val="DCE3EA"/>
+            </a:solidFill>
+          </a:ln>
+        </p:spPr>
+        <p:txBody>
+          <a:bodyPr wrap="square" lIns="254000" tIns="177800" rIns="203200" bIns="127000" anchor="t">
+            <a:normAutofit/>
+          </a:bodyPr>
+          <a:lstStyle/>
+          <a:p>
+            <a:pPr algn="l">
+              <a:spcAft>
+                <a:spcPts val="200"/>
+              </a:spcAft>
+              <a:buNone/>
+            </a:pPr>
+            <a:r>
+              <a:rPr lang="en-US" sz="1400" b="1" dirty="0">
+                <a:solidFill>
+                  <a:srgbClr val="B0413E"/>
+                </a:solidFill>
+                <a:latin typeface="+mn-lt"/>
+              </a:rPr>
+              <a:t>RISK</a:t>
+            </a:r>
+          </a:p>
+          <a:p>
+            <a:pPr algn="l">
+              <a:spcAft>
+                <a:spcPts val="300"/>
+              </a:spcAft>
+              <a:buNone/>
+            </a:pPr>
+            <a:r>
+              <a:rPr lang="en-US" sz="1800" b="1" dirty="0">
+                <a:solidFill>
+                  <a:srgbClr val="14324B"/>
+                </a:solidFill>
+              </a:rPr>
+              <a:t>Over Time (Yes)</a:t>
+            </a:r>
+          </a:p>
+          <a:p>
+            <a:pPr algn="l">
+              <a:lnSpc>
+                <a:spcPct val="105000"/>
+              </a:lnSpc>
+              <a:buNone/>
+            </a:pPr>
+            <a:r>
+              <a:rPr lang="en-US" sz="1400" dirty="0">
+                <a:solidFill>
+                  <a:srgbClr val="44515E"/>
+                </a:solidFill>
+              </a:rPr>
+              <a:t>Raises hazard by 120% — the single largest driver of attrition.</a:t>
+            </a:r>
+          </a:p>
+        </p:txBody>
+      </p:sp>
+      <p:sp>
+        <p:nvSpPr>
+          <p:cNvPr id="106" name="Shape 106"/>
+          <p:cNvSpPr/>
+          <p:nvPr/>
+        </p:nvSpPr>
+        <p:spPr>
+          <a:xfrm>
+            <a:off x="457200" y="3098800"/>
+            <a:ext cx="50800" cy="1371600"/>
+          </a:xfrm>
+          <a:prstGeom prst="rect">
+            <a:avLst/>
+          </a:prstGeom>
+          <a:solidFill>
+            <a:srgbClr val="B0413E"/>
+          </a:solidFill>
+          <a:ln>
+            <a:noFill/>
+          </a:ln>
+        </p:spPr>
+        <p:txBody>
+          <a:bodyPr wrap="square" lIns="0" tIns="0" rIns="0" bIns="0" anchor="t">
+            <a:normAutofit/>
+          </a:bodyPr>
+          <a:lstStyle/>
+          <a:p>
+            <a:endParaRPr lang="en-US"/>
+          </a:p>
+        </p:txBody>
+      </p:sp>
+      <p:sp>
+        <p:nvSpPr>
+          <p:cNvPr id="107" name="Shape 107"/>
+          <p:cNvSpPr/>
+          <p:nvPr/>
+        </p:nvSpPr>
+        <p:spPr>
+          <a:xfrm>
+            <a:off x="4673600" y="3098800"/>
+            <a:ext cx="4013200" cy="1371600"/>
+          </a:xfrm>
+          <a:prstGeom prst="rect">
+            <a:avLst/>
+          </a:prstGeom>
+          <a:solidFill>
+            <a:srgbClr val="F8FAFC"/>
+          </a:solidFill>
+          <a:ln w="12700">
+            <a:solidFill>
+              <a:srgbClr val="DCE3EA"/>
+            </a:solidFill>
+          </a:ln>
+        </p:spPr>
+        <p:txBody>
+          <a:bodyPr wrap="square" lIns="254000" tIns="177800" rIns="203200" bIns="127000" anchor="t">
+            <a:normAutofit/>
+          </a:bodyPr>
+          <a:lstStyle/>
+          <a:p>
+            <a:pPr algn="l">
+              <a:spcAft>
+                <a:spcPts val="200"/>
+              </a:spcAft>
+              <a:buNone/>
+            </a:pPr>
+            <a:r>
+              <a:rPr lang="en-US" sz="1400" b="1" dirty="0">
+                <a:solidFill>
+                  <a:srgbClr val="B0413E"/>
+                </a:solidFill>
+                <a:latin typeface="+mn-lt"/>
+              </a:rPr>
+              <a:t>RISK</a:t>
+            </a:r>
+          </a:p>
+          <a:p>
+            <a:pPr algn="l">
+              <a:spcAft>
+                <a:spcPts val="300"/>
+              </a:spcAft>
+              <a:buNone/>
+            </a:pPr>
+            <a:r>
+              <a:rPr lang="en-US" sz="1800" b="1" dirty="0">
+                <a:solidFill>
+                  <a:srgbClr val="14324B"/>
+                </a:solidFill>
+              </a:rPr>
+              <a:t>Num Companies Worked</a:t>
+            </a:r>
+          </a:p>
+          <a:p>
+            <a:pPr algn="l">
+              <a:lnSpc>
+                <a:spcPct val="105000"/>
+              </a:lnSpc>
+              <a:buNone/>
+            </a:pPr>
+            <a:r>
+              <a:rPr lang="en-US" sz="1400" dirty="0">
+                <a:solidFill>
+                  <a:srgbClr val="44515E"/>
+                </a:solidFill>
+              </a:rPr>
+              <a:t>Raises hazard by 9% for each prior employer.</a:t>
+            </a:r>
+          </a:p>
+        </p:txBody>
+      </p:sp>
+      <p:sp>
+        <p:nvSpPr>
+          <p:cNvPr id="108" name="Shape 108"/>
+          <p:cNvSpPr/>
+          <p:nvPr/>
+        </p:nvSpPr>
+        <p:spPr>
+          <a:xfrm>
+            <a:off x="4673600" y="3098800"/>
+            <a:ext cx="50800" cy="1371600"/>
+          </a:xfrm>
+          <a:prstGeom prst="rect">
+            <a:avLst/>
+          </a:prstGeom>
+          <a:solidFill>
+            <a:srgbClr val="B0413E"/>
+          </a:solidFill>
+          <a:ln>
+            <a:noFill/>
+          </a:ln>
+        </p:spPr>
+        <p:txBody>
+          <a:bodyPr wrap="square" lIns="0" tIns="0" rIns="0" bIns="0" anchor="t">
+            <a:normAutofit/>
+          </a:bodyPr>
+          <a:lstStyle/>
+          <a:p>
+            <a:endParaRPr lang="en-US"/>
+          </a:p>
+        </p:txBody>
+      </p:sp>
+      <p:sp>
+        <p:nvSpPr>
+          <p:cNvPr id="109" name="Shape 109"/>
+          <p:cNvSpPr/>
+          <p:nvPr/>
+        </p:nvSpPr>
+        <p:spPr>
+          <a:xfrm>
+            <a:off x="457200" y="4648200"/>
+            <a:ext cx="4013200" cy="1371600"/>
+          </a:xfrm>
+          <a:prstGeom prst="rect">
+            <a:avLst/>
+          </a:prstGeom>
+          <a:solidFill>
+            <a:srgbClr val="F8FAFC"/>
+          </a:solidFill>
+          <a:ln w="12700">
+            <a:solidFill>
+              <a:srgbClr val="DCE3EA"/>
+            </a:solidFill>
+          </a:ln>
+        </p:spPr>
+        <p:txBody>
+          <a:bodyPr wrap="square" lIns="254000" tIns="177800" rIns="203200" bIns="127000" anchor="t">
+            <a:normAutofit/>
+          </a:bodyPr>
+          <a:lstStyle/>
+          <a:p>
+            <a:pPr algn="l">
+              <a:spcAft>
+                <a:spcPts val="200"/>
+              </a:spcAft>
+              <a:buNone/>
+            </a:pPr>
+            <a:r>
+              <a:rPr lang="en-US" sz="1400" b="1" dirty="0">
+                <a:solidFill>
+                  <a:srgbClr val="2E7D5B"/>
+                </a:solidFill>
+                <a:latin typeface="+mn-lt"/>
+              </a:rPr>
+              <a:t>PROTECTIVE</a:t>
+            </a:r>
+          </a:p>
+          <a:p>
+            <a:pPr algn="l">
+              <a:spcAft>
+                <a:spcPts val="300"/>
+              </a:spcAft>
+              <a:buNone/>
+            </a:pPr>
+            <a:r>
+              <a:rPr lang="en-US" sz="1800" b="1" dirty="0">
+                <a:solidFill>
+                  <a:srgbClr val="14324B"/>
+                </a:solidFill>
+              </a:rPr>
+              <a:t>Job Level</a:t>
+            </a:r>
+          </a:p>
+          <a:p>
+            <a:pPr algn="l">
+              <a:lnSpc>
+                <a:spcPct val="105000"/>
+              </a:lnSpc>
+              <a:buNone/>
+            </a:pPr>
+            <a:r>
+              <a:rPr lang="en-US" sz="1400" dirty="0">
+                <a:solidFill>
+                  <a:srgbClr val="44515E"/>
+                </a:solidFill>
+              </a:rPr>
+              <a:t>Lowers hazard by 25% per level of seniority.</a:t>
+            </a:r>
+          </a:p>
+        </p:txBody>
+      </p:sp>
+      <p:sp>
+        <p:nvSpPr>
+          <p:cNvPr id="110" name="Shape 110"/>
+          <p:cNvSpPr/>
+          <p:nvPr/>
+        </p:nvSpPr>
+        <p:spPr>
+          <a:xfrm>
+            <a:off x="457200" y="4648200"/>
+            <a:ext cx="50800" cy="1371600"/>
+          </a:xfrm>
+          <a:prstGeom prst="rect">
+            <a:avLst/>
+          </a:prstGeom>
+          <a:solidFill>
+            <a:srgbClr val="2E7D5B"/>
+          </a:solidFill>
+          <a:ln>
+            <a:noFill/>
+          </a:ln>
+        </p:spPr>
+        <p:txBody>
+          <a:bodyPr wrap="square" lIns="0" tIns="0" rIns="0" bIns="0" anchor="t">
+            <a:normAutofit/>
+          </a:bodyPr>
+          <a:lstStyle/>
+          <a:p>
+            <a:endParaRPr lang="en-US"/>
+          </a:p>
+        </p:txBody>
+      </p:sp>
+      <p:sp>
+        <p:nvSpPr>
+          <p:cNvPr id="111" name="Shape 111"/>
+          <p:cNvSpPr/>
+          <p:nvPr/>
+        </p:nvSpPr>
+        <p:spPr>
+          <a:xfrm>
+            <a:off x="4673600" y="4648200"/>
+            <a:ext cx="4013200" cy="1371600"/>
+          </a:xfrm>
+          <a:prstGeom prst="rect">
+            <a:avLst/>
+          </a:prstGeom>
+          <a:solidFill>
+            <a:srgbClr val="F8FAFC"/>
+          </a:solidFill>
+          <a:ln w="12700">
+            <a:solidFill>
+              <a:srgbClr val="DCE3EA"/>
+            </a:solidFill>
+          </a:ln>
+        </p:spPr>
+        <p:txBody>
+          <a:bodyPr wrap="square" lIns="254000" tIns="177800" rIns="203200" bIns="127000" anchor="t">
+            <a:normAutofit/>
+          </a:bodyPr>
+          <a:lstStyle/>
+          <a:p>
+            <a:pPr algn="l">
+              <a:spcAft>
+                <a:spcPts val="200"/>
+              </a:spcAft>
+              <a:buNone/>
+            </a:pPr>
+            <a:r>
+              <a:rPr lang="en-US" sz="1400" b="1" dirty="0">
+                <a:solidFill>
+                  <a:srgbClr val="2E7D5B"/>
+                </a:solidFill>
+                <a:latin typeface="+mn-lt"/>
+              </a:rPr>
+              <a:t>PROTECTIVE</a:t>
+            </a:r>
+          </a:p>
+          <a:p>
+            <a:pPr algn="l">
+              <a:spcAft>
+                <a:spcPts val="300"/>
+              </a:spcAft>
+              <a:buNone/>
+            </a:pPr>
+            <a:r>
+              <a:rPr lang="en-US" sz="1800" b="1" dirty="0">
+                <a:solidFill>
+                  <a:srgbClr val="14324B"/>
+                </a:solidFill>
+              </a:rPr>
+              <a:t>Age</a:t>
+            </a:r>
+          </a:p>
+          <a:p>
+            <a:pPr algn="l">
+              <a:lnSpc>
+                <a:spcPct val="105000"/>
+              </a:lnSpc>
+              <a:buNone/>
+            </a:pPr>
+            <a:r>
+              <a:rPr lang="en-US" sz="1400" dirty="0">
+                <a:solidFill>
+                  <a:srgbClr val="44515E"/>
+                </a:solidFill>
+              </a:rPr>
+              <a:t>Lowers hazard by 3% per additional year.</a:t>
+            </a:r>
+          </a:p>
+        </p:txBody>
+      </p:sp>
+      <p:sp>
+        <p:nvSpPr>
+          <p:cNvPr id="112" name="Shape 112"/>
+          <p:cNvSpPr/>
+          <p:nvPr/>
+        </p:nvSpPr>
+        <p:spPr>
+          <a:xfrm>
+            <a:off x="4673600" y="4648200"/>
+            <a:ext cx="50800" cy="1371600"/>
+          </a:xfrm>
+          <a:prstGeom prst="rect">
+            <a:avLst/>
+          </a:prstGeom>
+          <a:solidFill>
+            <a:srgbClr val="2E7D5B"/>
+          </a:solidFill>
+          <a:ln>
+            <a:noFill/>
+          </a:ln>
+        </p:spPr>
+        <p:txBody>
+          <a:bodyPr wrap="square" lIns="0" tIns="0" rIns="0" bIns="0" anchor="t">
+            <a:normAutofit/>
+          </a:bodyPr>
+          <a:lstStyle/>
+          <a:p>
+            <a:endParaRPr lang="en-US"/>
+          </a:p>
+        </p:txBody>
+      </p:sp>
+      <p:sp>
+        <p:nvSpPr>
+          <p:cNvPr id="115" name="Shape 115"/>
+          <p:cNvSpPr/>
+          <p:nvPr/>
+        </p:nvSpPr>
+        <p:spPr>
+          <a:xfrm>
+            <a:off x="457200" y="6248400"/>
+            <a:ext cx="8229600" cy="12700"/>
+          </a:xfrm>
+          <a:prstGeom prst="rect">
+            <a:avLst/>
+          </a:prstGeom>
+          <a:solidFill>
+            <a:srgbClr val="DCE3EA"/>
+          </a:solidFill>
+          <a:ln>
+            <a:noFill/>
+          </a:ln>
+        </p:spPr>
+        <p:txBody>
+          <a:bodyPr wrap="square" lIns="0" tIns="0" rIns="0" bIns="0" anchor="t">
+            <a:normAutofit fontScale="25000" lnSpcReduction="20000"/>
+          </a:bodyPr>
+          <a:lstStyle/>
+          <a:p>
+            <a:endParaRPr lang="en-US"/>
+          </a:p>
+        </p:txBody>
+      </p:sp>
       <p:sp>
         <p:nvSpPr>
           <p:cNvPr id="2" name="TextBox 1"/>
@@ -3573,8 +6953,8 @@
         </p:nvSpPr>
         <p:spPr>
           <a:xfrm>
-            <a:off x="365760" y="274320"/>
-            <a:ext cx="8412480" cy="731520"/>
+            <a:off x="457200" y="584200"/>
+            <a:ext cx="7874000" cy="492443"/>
           </a:xfrm>
           <a:prstGeom prst="rect">
             <a:avLst/>
@@ -3582,127 +6962,20 @@
           <a:noFill/>
         </p:spPr>
         <p:txBody>
-          <a:bodyPr wrap="none">
+          <a:bodyPr wrap="square" lIns="0" tIns="0" rIns="0" bIns="0">
             <a:spAutoFit/>
           </a:bodyPr>
           <a:lstStyle/>
           <a:p>
-            <a:pPr>
-              <a:defRPr sz="2800" b="1"/>
-            </a:pPr>
-            <a:r>
-              <a:t>Who Is at Risk Right Now</a:t>
-            </a:r>
-          </a:p>
-        </p:txBody>
-      </p:sp>
-      <p:pic>
-        <p:nvPicPr>
-          <p:cNvPr id="3" name="Picture 2" descr="risk_distribution.png"/>
-          <p:cNvPicPr>
-            <a:picLocks noChangeAspect="1"/>
-          </p:cNvPicPr>
-          <p:nvPr/>
-        </p:nvPicPr>
-        <p:blipFill>
-          <a:blip r:embed="rId2"/>
-          <a:stretch>
-            <a:fillRect/>
-          </a:stretch>
-        </p:blipFill>
-        <p:spPr>
-          <a:xfrm>
-            <a:off x="365760" y="1188720"/>
-            <a:ext cx="5486400" cy="1959429"/>
-          </a:xfrm>
-          <a:prstGeom prst="rect">
-            <a:avLst/>
-          </a:prstGeom>
-        </p:spPr>
-      </p:pic>
-      <p:sp>
-        <p:nvSpPr>
-          <p:cNvPr id="4" name="TextBox 3"/>
-          <p:cNvSpPr txBox="1"/>
-          <p:nvPr/>
-        </p:nvSpPr>
-        <p:spPr>
-          <a:xfrm>
-            <a:off x="6035040" y="1188720"/>
-            <a:ext cx="2743200" cy="5029200"/>
-          </a:xfrm>
-          <a:prstGeom prst="rect">
-            <a:avLst/>
-          </a:prstGeom>
-          <a:noFill/>
-        </p:spPr>
-        <p:txBody>
-          <a:bodyPr wrap="square">
-            <a:spAutoFit/>
-          </a:bodyPr>
-          <a:lstStyle/>
-          <a:p>
-            <a:pPr>
-              <a:defRPr sz="1400"/>
-            </a:pPr>
-            <a:r>
-              <a:t>- 1233 current employees scored; top 15 shown ranked by 1-year leave probability.</a:t>
-            </a:r>
-          </a:p>
-          <a:p>
-            <a:pPr>
-              <a:defRPr sz="1400"/>
-            </a:pPr>
-            <a:r>
-              <a:t>- Highest risk score: 8.19 vs. median 0.98.</a:t>
-            </a:r>
-          </a:p>
-        </p:txBody>
-      </p:sp>
-    </p:spTree>
-  </p:cSld>
-  <p:clrMapOvr>
-    <a:masterClrMapping/>
-  </p:clrMapOvr>
-</p:sld>
-</file>
-
-<file path=ppt/slides/slide6.xml><?xml version="1.0" encoding="utf-8"?>
-<p:sld xmlns:a="http://schemas.openxmlformats.org/drawingml/2006/main" xmlns:p="http://schemas.openxmlformats.org/presentationml/2006/main" xmlns:r="http://schemas.openxmlformats.org/officeDocument/2006/relationships">
-  <p:cSld>
-    <p:spTree>
-      <p:nvGrpSpPr>
-        <p:cNvPr id="1" name=""/>
-        <p:cNvGrpSpPr/>
-        <p:nvPr/>
-      </p:nvGrpSpPr>
-      <p:grpSpPr/>
-      <p:sp>
-        <p:nvSpPr>
-          <p:cNvPr id="2" name="TextBox 1"/>
-          <p:cNvSpPr txBox="1"/>
-          <p:nvPr/>
-        </p:nvSpPr>
-        <p:spPr>
-          <a:xfrm>
-            <a:off x="365760" y="274320"/>
-            <a:ext cx="8412480" cy="731520"/>
-          </a:xfrm>
-          <a:prstGeom prst="rect">
-            <a:avLst/>
-          </a:prstGeom>
-          <a:noFill/>
-        </p:spPr>
-        <p:txBody>
-          <a:bodyPr wrap="none">
-            <a:spAutoFit/>
-          </a:bodyPr>
-          <a:lstStyle/>
-          <a:p>
-            <a:pPr>
-              <a:defRPr sz="2800" b="1"/>
-            </a:pPr>
-            <a:r>
+            <a:pPr algn="l">
+              <a:buNone/>
+            </a:pPr>
+            <a:r>
+              <a:rPr lang="en-US" sz="3200" b="1" dirty="0">
+                <a:solidFill>
+                  <a:srgbClr val="FFFFFF"/>
+                </a:solidFill>
+              </a:rPr>
               <a:t>Recommendations</a:t>
             </a:r>
           </a:p>
@@ -3716,8 +6989,8 @@
         </p:nvSpPr>
         <p:spPr>
           <a:xfrm>
-            <a:off x="548640" y="1188720"/>
-            <a:ext cx="2743200" cy="5029200"/>
+            <a:off x="762000" y="1701800"/>
+            <a:ext cx="7670800" cy="487313"/>
           </a:xfrm>
           <a:prstGeom prst="rect">
             <a:avLst/>
@@ -3725,53 +6998,191 @@
           <a:noFill/>
         </p:spPr>
         <p:txBody>
-          <a:bodyPr wrap="square">
+          <a:bodyPr wrap="square" lIns="0" tIns="0" rIns="0" bIns="0">
             <a:spAutoFit/>
           </a:bodyPr>
           <a:lstStyle/>
           <a:p>
-            <a:pPr>
-              <a:defRPr sz="1400"/>
-            </a:pPr>
-            <a:r>
-              <a:t>- Prioritize retention conversations with the top 15 employees flagged above.</a:t>
-            </a:r>
-          </a:p>
-          <a:p>
-            <a:pPr>
-              <a:defRPr sz="1400"/>
-            </a:pPr>
-            <a:r>
-              <a:t>- Address Over Time (Yes): raises hazard by 120%.</a:t>
-            </a:r>
-          </a:p>
-          <a:p>
-            <a:pPr>
-              <a:defRPr sz="1400"/>
-            </a:pPr>
-            <a:r>
-              <a:t>- Age is protective: lowers hazard by 3%.</a:t>
-            </a:r>
-          </a:p>
-          <a:p>
-            <a:pPr>
-              <a:defRPr sz="1400"/>
-            </a:pPr>
-            <a:r>
-              <a:t>- Job Level is protective: lowers hazard by 25%.</a:t>
-            </a:r>
-          </a:p>
-          <a:p>
-            <a:pPr>
-              <a:defRPr sz="1400"/>
-            </a:pPr>
-            <a:r>
-              <a:t>- Address Num Companies Worked: raises hazard by 9%.</a:t>
+            <a:pPr algn="l">
+              <a:spcAft>
+                <a:spcPts val="200"/>
+              </a:spcAft>
+              <a:buNone/>
+            </a:pPr>
+            <a:r>
+              <a:rPr lang="en-US" sz="1400" b="1" spc="200" dirty="0">
+                <a:solidFill>
+                  <a:srgbClr val="C9772F"/>
+                </a:solidFill>
+              </a:rPr>
+              <a:t>PRIORITY ACTION</a:t>
+            </a:r>
+          </a:p>
+          <a:p>
+            <a:pPr algn="l">
+              <a:buNone/>
+            </a:pPr>
+            <a:r>
+              <a:rPr lang="en-US" sz="1600" dirty="0">
+                <a:solidFill>
+                  <a:srgbClr val="1F2933"/>
+                </a:solidFill>
+              </a:rPr>
+              <a:t>Prioritize retention conversations with the top 15 employees flagged above.</a:t>
+            </a:r>
+          </a:p>
+        </p:txBody>
+      </p:sp>
+      <p:sp>
+        <p:nvSpPr>
+          <p:cNvPr id="113" name="Text 113"/>
+          <p:cNvSpPr txBox="1"/>
+          <p:nvPr/>
+        </p:nvSpPr>
+        <p:spPr>
+          <a:xfrm>
+            <a:off x="457200" y="279400"/>
+            <a:ext cx="7874000" cy="254000"/>
+          </a:xfrm>
+          <a:prstGeom prst="rect">
+            <a:avLst/>
+          </a:prstGeom>
+          <a:noFill/>
+        </p:spPr>
+        <p:txBody>
+          <a:bodyPr wrap="square" lIns="0" tIns="0" rIns="0" bIns="0" anchor="t">
+            <a:normAutofit/>
+          </a:bodyPr>
+          <a:lstStyle/>
+          <a:p>
+            <a:pPr algn="l">
+              <a:buNone/>
+            </a:pPr>
+            <a:r>
+              <a:rPr lang="en-US" sz="1400" b="1" spc="300" dirty="0">
+                <a:solidFill>
+                  <a:srgbClr val="9FB6C9"/>
+                </a:solidFill>
+              </a:rPr>
+              <a:t>EXECUTIVE REPORT   |   SURVIVAL ANALYSIS</a:t>
+            </a:r>
+          </a:p>
+        </p:txBody>
+      </p:sp>
+      <p:sp>
+        <p:nvSpPr>
+          <p:cNvPr id="114" name="Text 114"/>
+          <p:cNvSpPr txBox="1"/>
+          <p:nvPr/>
+        </p:nvSpPr>
+        <p:spPr>
+          <a:xfrm>
+            <a:off x="457200" y="2717800"/>
+            <a:ext cx="7874000" cy="254000"/>
+          </a:xfrm>
+          <a:prstGeom prst="rect">
+            <a:avLst/>
+          </a:prstGeom>
+          <a:noFill/>
+        </p:spPr>
+        <p:txBody>
+          <a:bodyPr wrap="square" lIns="0" tIns="0" rIns="0" bIns="0" anchor="t">
+            <a:normAutofit/>
+          </a:bodyPr>
+          <a:lstStyle/>
+          <a:p>
+            <a:pPr algn="l">
+              <a:buNone/>
+            </a:pPr>
+            <a:r>
+              <a:rPr lang="en-US" sz="1400" b="1" spc="240" dirty="0">
+                <a:solidFill>
+                  <a:srgbClr val="6B7C8C"/>
+                </a:solidFill>
+              </a:rPr>
+              <a:t>KEY HAZARD DRIVERS</a:t>
+            </a:r>
+          </a:p>
+        </p:txBody>
+      </p:sp>
+      <p:sp>
+        <p:nvSpPr>
+          <p:cNvPr id="116" name="Text 116"/>
+          <p:cNvSpPr txBox="1"/>
+          <p:nvPr/>
+        </p:nvSpPr>
+        <p:spPr>
+          <a:xfrm>
+            <a:off x="457200" y="6350000"/>
+            <a:ext cx="6096000" cy="254000"/>
+          </a:xfrm>
+          <a:prstGeom prst="rect">
+            <a:avLst/>
+          </a:prstGeom>
+          <a:noFill/>
+        </p:spPr>
+        <p:txBody>
+          <a:bodyPr wrap="square" lIns="0" tIns="0" rIns="0" bIns="0" anchor="t">
+            <a:normAutofit/>
+          </a:bodyPr>
+          <a:lstStyle/>
+          <a:p>
+            <a:pPr algn="l">
+              <a:buNone/>
+            </a:pPr>
+            <a:r>
+              <a:rPr lang="en-US" sz="1400" dirty="0">
+                <a:solidFill>
+                  <a:srgbClr val="8A98A5"/>
+                </a:solidFill>
+              </a:rPr>
+              <a:t>Cox Proportional Hazards Model  |  Employee Attrition Analysis</a:t>
+            </a:r>
+          </a:p>
+        </p:txBody>
+      </p:sp>
+      <p:sp>
+        <p:nvSpPr>
+          <p:cNvPr id="117" name="Text 117"/>
+          <p:cNvSpPr txBox="1"/>
+          <p:nvPr/>
+        </p:nvSpPr>
+        <p:spPr>
+          <a:xfrm>
+            <a:off x="7670800" y="6350000"/>
+            <a:ext cx="1016000" cy="254000"/>
+          </a:xfrm>
+          <a:prstGeom prst="rect">
+            <a:avLst/>
+          </a:prstGeom>
+          <a:noFill/>
+        </p:spPr>
+        <p:txBody>
+          <a:bodyPr wrap="square" lIns="0" tIns="0" rIns="0" bIns="0" anchor="t">
+            <a:normAutofit/>
+          </a:bodyPr>
+          <a:lstStyle/>
+          <a:p>
+            <a:pPr algn="r">
+              <a:buNone/>
+            </a:pPr>
+            <a:r>
+              <a:rPr lang="en-US" sz="1400" b="1" dirty="0">
+                <a:solidFill>
+                  <a:srgbClr val="14324B"/>
+                </a:solidFill>
+              </a:rPr>
+              <a:t>05</a:t>
             </a:r>
           </a:p>
         </p:txBody>
       </p:sp>
     </p:spTree>
+    <p:extLst>
+      <p:ext uri="{BB962C8B-B14F-4D97-AF65-F5344CB8AC3E}">
+        <p14:creationId xmlns:p14="http://schemas.microsoft.com/office/powerpoint/2010/main" val="1500844885"/>
+      </p:ext>
+    </p:extLst>
   </p:cSld>
   <p:clrMapOvr>
     <a:masterClrMapping/>
@@ -4097,4 +7508,26 @@
   </a:objectDefaults>
   <a:extraClrSchemeLst/>
 </a:theme>
+</file>
+
+<file path=ppt/webextensions/taskpanes.xml><?xml version="1.0" encoding="utf-8"?>
+<wetp:taskpanes xmlns:wetp="http://schemas.microsoft.com/office/webextensions/taskpanes/2010/11">
+  <wetp:taskpane dockstate="right" visibility="0" width="438" row="0">
+    <wetp:webextensionref xmlns:r="http://schemas.openxmlformats.org/officeDocument/2006/relationships" r:id="rId1"/>
+  </wetp:taskpane>
+</wetp:taskpanes>
+</file>
+
+<file path=ppt/webextensions/webextension1.xml><?xml version="1.0" encoding="utf-8"?>
+<we:webextension xmlns:we="http://schemas.microsoft.com/office/webextensions/webextension/2010/11" id="{64A06A5F-C839-47DF-AC3E-88B97318A129}">
+  <we:reference id="wa200010001" version="1.0.0.1" store="en-US" storeType="OMEX"/>
+  <we:alternateReferences>
+    <we:reference id="WA200010001" version="1.0.0.1" store="" storeType="OMEX"/>
+  </we:alternateReferences>
+  <we:properties>
+    <we:property name="claude.fileId" value="&quot;34569eda-aa51-429d-ac65-45069a0c1f24&quot;"/>
+  </we:properties>
+  <we:bindings/>
+  <we:snapshot xmlns:r="http://schemas.openxmlformats.org/officeDocument/2006/relationships"/>
+</we:webextension>
 </file>